--- a/public/lessons/year-6-maths/autumn/week-6/reason-about-equivalent-expressions/teaching-powerpoint-v1.pptx
+++ b/public/lessons/year-6-maths/autumn/week-6/reason-about-equivalent-expressions/teaching-powerpoint-v1.pptx
@@ -2,24 +2,24 @@
 <file path=ppt/presentation.xml><?xml version="1.0" encoding="utf-8"?>
 <p:presentation xmlns:p="http://schemas.openxmlformats.org/presentationml/2006/main">
   <p:sldMasterIdLst>
-    <p:sldMasterId xmlns:r="http://schemas.openxmlformats.org/officeDocument/2006/relationships" id="2147483648" r:id="R80312f33dbff49f4"/>
+    <p:sldMasterId xmlns:r="http://schemas.openxmlformats.org/officeDocument/2006/relationships" id="2147483648" r:id="R46a5fd0e9d3c44c8"/>
   </p:sldMasterIdLst>
   <p:notesMasterIdLst>
-    <p:notesMasterId xmlns:r="http://schemas.openxmlformats.org/officeDocument/2006/relationships" r:id="Rf3c40a9685454a9d"/>
+    <p:notesMasterId xmlns:r="http://schemas.openxmlformats.org/officeDocument/2006/relationships" r:id="Radf303112858442a"/>
   </p:notesMasterIdLst>
   <p:sldIdLst>
-    <p:sldId xmlns:r="http://schemas.openxmlformats.org/officeDocument/2006/relationships" id="256" r:id="R45eff9311998485b"/>
-    <p:sldId xmlns:r="http://schemas.openxmlformats.org/officeDocument/2006/relationships" id="257" r:id="Rcac9b6aa2c2b4af1"/>
-    <p:sldId xmlns:r="http://schemas.openxmlformats.org/officeDocument/2006/relationships" id="258" r:id="R58c66f68d0784b74"/>
-    <p:sldId xmlns:r="http://schemas.openxmlformats.org/officeDocument/2006/relationships" id="259" r:id="R93054d95044f45fa"/>
-    <p:sldId xmlns:r="http://schemas.openxmlformats.org/officeDocument/2006/relationships" id="260" r:id="R13875af47f38418d"/>
-    <p:sldId xmlns:r="http://schemas.openxmlformats.org/officeDocument/2006/relationships" id="261" r:id="Rad31e8272dc24880"/>
-    <p:sldId xmlns:r="http://schemas.openxmlformats.org/officeDocument/2006/relationships" id="262" r:id="R198da277ec5c47b1"/>
-    <p:sldId xmlns:r="http://schemas.openxmlformats.org/officeDocument/2006/relationships" id="263" r:id="R3a8c50c91e474995"/>
-    <p:sldId xmlns:r="http://schemas.openxmlformats.org/officeDocument/2006/relationships" id="264" r:id="R4f97ca34a2bd4728"/>
-    <p:sldId xmlns:r="http://schemas.openxmlformats.org/officeDocument/2006/relationships" id="265" r:id="R50a2d53c1076479e"/>
-    <p:sldId xmlns:r="http://schemas.openxmlformats.org/officeDocument/2006/relationships" id="266" r:id="Rf96c3eaaa71f4766"/>
-    <p:sldId xmlns:r="http://schemas.openxmlformats.org/officeDocument/2006/relationships" id="267" r:id="Re577555da57448ea"/>
+    <p:sldId xmlns:r="http://schemas.openxmlformats.org/officeDocument/2006/relationships" id="256" r:id="R8552cec03a8b41a3"/>
+    <p:sldId xmlns:r="http://schemas.openxmlformats.org/officeDocument/2006/relationships" id="257" r:id="Rb541317ddb5745ca"/>
+    <p:sldId xmlns:r="http://schemas.openxmlformats.org/officeDocument/2006/relationships" id="258" r:id="R6c6be26295ee4443"/>
+    <p:sldId xmlns:r="http://schemas.openxmlformats.org/officeDocument/2006/relationships" id="259" r:id="R1e0d00c1f18347b7"/>
+    <p:sldId xmlns:r="http://schemas.openxmlformats.org/officeDocument/2006/relationships" id="260" r:id="R428e20a9e5834f54"/>
+    <p:sldId xmlns:r="http://schemas.openxmlformats.org/officeDocument/2006/relationships" id="261" r:id="R774b88a61f614639"/>
+    <p:sldId xmlns:r="http://schemas.openxmlformats.org/officeDocument/2006/relationships" id="262" r:id="R6cc0986e7dca4193"/>
+    <p:sldId xmlns:r="http://schemas.openxmlformats.org/officeDocument/2006/relationships" id="263" r:id="R63275925a4fc4ec7"/>
+    <p:sldId xmlns:r="http://schemas.openxmlformats.org/officeDocument/2006/relationships" id="264" r:id="Rc0e2af9ae1a2453e"/>
+    <p:sldId xmlns:r="http://schemas.openxmlformats.org/officeDocument/2006/relationships" id="265" r:id="R22503102e98b45d8"/>
+    <p:sldId xmlns:r="http://schemas.openxmlformats.org/officeDocument/2006/relationships" id="266" r:id="R0a11299cfcde4b04"/>
+    <p:sldId xmlns:r="http://schemas.openxmlformats.org/officeDocument/2006/relationships" id="267" r:id="Rc783b9c5bc8a49e6"/>
   </p:sldIdLst>
   <p:sldSz cx="12192000" cy="6858000"/>
   <p:notesSz cx="6858000" cy="9144000"/>
@@ -873,7 +873,7 @@
           <a:lstStyle xmlns:a="http://schemas.openxmlformats.org/drawingml/2006/main"/>
           <a:p xmlns:a="http://schemas.openxmlformats.org/drawingml/2006/main">
             <a:r>
-              <a:t>I do. Reveal the question, setup and each calculation stage one click at a time. Pupils watch before copying. Model answer: Yes, both equal 161.</a:t>
+              <a:t>I do. Reveal the question, then reveal each mathematical change one click at a time. Point to the numbers and operation that changed before moving to the next line. Final answer: Yes, both equal 161.</a:t>
             </a:r>
           </a:p>
         </p:txBody>
@@ -1291,7 +1291,7 @@
   </p:cSld>
   <p:clrMap bg1="lt1" tx1="dk1" bg2="lt2" tx2="dk2" accent1="accent1" accent2="accent2" accent3="accent3" accent4="accent4" accent5="accent5" accent6="accent6" hlink="hlink" folHlink="folHlink"/>
   <p:sldLayoutIdLst>
-    <p:sldLayoutId xmlns:r="http://schemas.openxmlformats.org/officeDocument/2006/relationships" id="2147483649" r:id="Raddaf306017d47af"/>
+    <p:sldLayoutId xmlns:r="http://schemas.openxmlformats.org/officeDocument/2006/relationships" id="2147483649" r:id="R22f0cda0276547db"/>
   </p:sldLayoutIdLst>
   <p:txStyles>
     <p:titleStyle>
@@ -1842,7 +1842,7 @@
           <p:cNvPr id="12" name="">
             <a:extLst xmlns:a="http://schemas.openxmlformats.org/drawingml/2006/main">
               <a:ext uri="{FF2B5EF4-FFF2-40B4-BE49-F238E27FC236}">
-                <a16:creationId xmlns:a16="http://schemas.microsoft.com/office/drawing/2014/main" id="{520F5071-B9F2-4763-92E0-DBB484FF0F07}"/>
+                <a16:creationId xmlns:a16="http://schemas.microsoft.com/office/drawing/2014/main" id="{7D9912F1-1FBF-4C3E-B319-76092405900A}"/>
               </a:ext>
             </a:extLst>
           </p:cNvPr>
@@ -1874,7 +1874,7 @@
           <p:cNvPr id="2" name="">
             <a:extLst xmlns:a="http://schemas.openxmlformats.org/drawingml/2006/main">
               <a:ext uri="{FF2B5EF4-FFF2-40B4-BE49-F238E27FC236}">
-                <a16:creationId xmlns:a16="http://schemas.microsoft.com/office/drawing/2014/main" id="{33BD9295-21FE-4595-BF31-E2CA33B99175}"/>
+                <a16:creationId xmlns:a16="http://schemas.microsoft.com/office/drawing/2014/main" id="{E65A8E1E-8BBB-44E2-93FD-D4CDCB4A8F1F}"/>
               </a:ext>
             </a:extLst>
           </p:cNvPr>
@@ -1931,7 +1931,7 @@
           <p:cNvPr id="3" name="">
             <a:extLst xmlns:a="http://schemas.openxmlformats.org/drawingml/2006/main">
               <a:ext uri="{FF2B5EF4-FFF2-40B4-BE49-F238E27FC236}">
-                <a16:creationId xmlns:a16="http://schemas.microsoft.com/office/drawing/2014/main" id="{28867BBE-55DB-4424-8D83-3A96AB35BF87}"/>
+                <a16:creationId xmlns:a16="http://schemas.microsoft.com/office/drawing/2014/main" id="{DE2142A4-8986-4364-ADB4-1C50F36DDD2F}"/>
               </a:ext>
             </a:extLst>
           </p:cNvPr>
@@ -1965,7 +1965,7 @@
           <p:cNvPr id="4" name="">
             <a:extLst xmlns:a="http://schemas.openxmlformats.org/drawingml/2006/main">
               <a:ext uri="{FF2B5EF4-FFF2-40B4-BE49-F238E27FC236}">
-                <a16:creationId xmlns:a16="http://schemas.microsoft.com/office/drawing/2014/main" id="{6C044A4C-A0C0-4797-85A3-1F77B689697C}"/>
+                <a16:creationId xmlns:a16="http://schemas.microsoft.com/office/drawing/2014/main" id="{1F38F7D9-464A-4A78-890A-DF9252517F92}"/>
               </a:ext>
             </a:extLst>
           </p:cNvPr>
@@ -2022,7 +2022,7 @@
           <p:cNvPr id="5" name="">
             <a:extLst xmlns:a="http://schemas.openxmlformats.org/drawingml/2006/main">
               <a:ext uri="{FF2B5EF4-FFF2-40B4-BE49-F238E27FC236}">
-                <a16:creationId xmlns:a16="http://schemas.microsoft.com/office/drawing/2014/main" id="{407C3E5A-17C9-49D2-A58A-EB8E05EE54E5}"/>
+                <a16:creationId xmlns:a16="http://schemas.microsoft.com/office/drawing/2014/main" id="{172C9832-FD09-48B0-AAEA-2493C5373E68}"/>
               </a:ext>
             </a:extLst>
           </p:cNvPr>
@@ -2079,7 +2079,7 @@
           <p:cNvPr id="6" name="">
             <a:extLst xmlns:a="http://schemas.openxmlformats.org/drawingml/2006/main">
               <a:ext uri="{FF2B5EF4-FFF2-40B4-BE49-F238E27FC236}">
-                <a16:creationId xmlns:a16="http://schemas.microsoft.com/office/drawing/2014/main" id="{F137FEE2-D2C7-4CA2-A951-5F863AF81C35}"/>
+                <a16:creationId xmlns:a16="http://schemas.microsoft.com/office/drawing/2014/main" id="{2D72A0E0-4221-4F2C-8E34-4BFC0D2C6FE9}"/>
               </a:ext>
             </a:extLst>
           </p:cNvPr>
@@ -2113,7 +2113,7 @@
           <p:cNvPr id="7" name="">
             <a:extLst xmlns:a="http://schemas.openxmlformats.org/drawingml/2006/main">
               <a:ext uri="{FF2B5EF4-FFF2-40B4-BE49-F238E27FC236}">
-                <a16:creationId xmlns:a16="http://schemas.microsoft.com/office/drawing/2014/main" id="{A51C4F95-CCA1-4E78-A75A-E31FE38DE8E1}"/>
+                <a16:creationId xmlns:a16="http://schemas.microsoft.com/office/drawing/2014/main" id="{08F4EE84-B3CF-41FB-8578-B757D10F7733}"/>
               </a:ext>
             </a:extLst>
           </p:cNvPr>
@@ -2170,7 +2170,7 @@
           <p:cNvPr id="8" name="">
             <a:extLst xmlns:a="http://schemas.openxmlformats.org/drawingml/2006/main">
               <a:ext uri="{FF2B5EF4-FFF2-40B4-BE49-F238E27FC236}">
-                <a16:creationId xmlns:a16="http://schemas.microsoft.com/office/drawing/2014/main" id="{907D24C7-00BA-4B4B-A3C4-627CFDDFCCCD}"/>
+                <a16:creationId xmlns:a16="http://schemas.microsoft.com/office/drawing/2014/main" id="{305865EA-556D-4538-B0FB-B29601BDDB38}"/>
               </a:ext>
             </a:extLst>
           </p:cNvPr>
@@ -2227,7 +2227,7 @@
           <p:cNvPr id="9" name="">
             <a:extLst xmlns:a="http://schemas.openxmlformats.org/drawingml/2006/main">
               <a:ext uri="{FF2B5EF4-FFF2-40B4-BE49-F238E27FC236}">
-                <a16:creationId xmlns:a16="http://schemas.microsoft.com/office/drawing/2014/main" id="{C36B52D0-75C4-4C62-90F4-1FF26B20296C}"/>
+                <a16:creationId xmlns:a16="http://schemas.microsoft.com/office/drawing/2014/main" id="{7B09C613-6C53-443C-99D1-774E8061E4D3}"/>
               </a:ext>
             </a:extLst>
           </p:cNvPr>
@@ -2284,7 +2284,7 @@
           <p:cNvPr id="10" name="">
             <a:extLst xmlns:a="http://schemas.openxmlformats.org/drawingml/2006/main">
               <a:ext uri="{FF2B5EF4-FFF2-40B4-BE49-F238E27FC236}">
-                <a16:creationId xmlns:a16="http://schemas.microsoft.com/office/drawing/2014/main" id="{9E7D5DEF-8F4F-4049-9C97-AE4497F16231}"/>
+                <a16:creationId xmlns:a16="http://schemas.microsoft.com/office/drawing/2014/main" id="{EA29AB4E-94EB-42D7-8EEC-AA36A4FDB121}"/>
               </a:ext>
             </a:extLst>
           </p:cNvPr>
@@ -2341,7 +2341,7 @@
           <p:cNvPr id="11" name="">
             <a:extLst xmlns:a="http://schemas.openxmlformats.org/drawingml/2006/main">
               <a:ext uri="{FF2B5EF4-FFF2-40B4-BE49-F238E27FC236}">
-                <a16:creationId xmlns:a16="http://schemas.microsoft.com/office/drawing/2014/main" id="{BC19E950-86F6-4817-92F9-F3BCAF4F7595}"/>
+                <a16:creationId xmlns:a16="http://schemas.microsoft.com/office/drawing/2014/main" id="{40E6EEC3-8595-4427-903E-DDC93CE94F2E}"/>
               </a:ext>
             </a:extLst>
           </p:cNvPr>
@@ -2396,7 +2396,7 @@
     </p:spTree>
     <p:extLst>
       <p:ext uri="{BB962C8B-B14F-4D97-AF65-F5344CB8AC3E}">
-        <p14:creationId xmlns:p14="http://schemas.microsoft.com/office/powerpoint/2010/main" val="700843489"/>
+        <p14:creationId xmlns:p14="http://schemas.microsoft.com/office/powerpoint/2010/main" val="1552558905"/>
       </p:ext>
     </p:extLst>
   </p:cSld>
@@ -2427,7 +2427,7 @@
           <p:cNvPr id="14" name="">
             <a:extLst xmlns:a="http://schemas.openxmlformats.org/drawingml/2006/main">
               <a:ext uri="{FF2B5EF4-FFF2-40B4-BE49-F238E27FC236}">
-                <a16:creationId xmlns:a16="http://schemas.microsoft.com/office/drawing/2014/main" id="{97F3330B-194B-4857-8D0B-4341B8B0C25C}"/>
+                <a16:creationId xmlns:a16="http://schemas.microsoft.com/office/drawing/2014/main" id="{5F2FC1CB-162D-42AD-AB83-2C6C119A50F7}"/>
               </a:ext>
             </a:extLst>
           </p:cNvPr>
@@ -2459,7 +2459,7 @@
           <p:cNvPr id="2" name="">
             <a:extLst xmlns:a="http://schemas.openxmlformats.org/drawingml/2006/main">
               <a:ext uri="{FF2B5EF4-FFF2-40B4-BE49-F238E27FC236}">
-                <a16:creationId xmlns:a16="http://schemas.microsoft.com/office/drawing/2014/main" id="{FC924E0B-3A7A-429C-8B03-0609F287F4C4}"/>
+                <a16:creationId xmlns:a16="http://schemas.microsoft.com/office/drawing/2014/main" id="{A249E9B4-7229-47F3-AAA2-E7F1E2ED4057}"/>
               </a:ext>
             </a:extLst>
           </p:cNvPr>
@@ -2516,7 +2516,7 @@
           <p:cNvPr id="3" name="">
             <a:extLst xmlns:a="http://schemas.openxmlformats.org/drawingml/2006/main">
               <a:ext uri="{FF2B5EF4-FFF2-40B4-BE49-F238E27FC236}">
-                <a16:creationId xmlns:a16="http://schemas.microsoft.com/office/drawing/2014/main" id="{83CBC4F6-71FB-4A5F-85DB-683036FF6468}"/>
+                <a16:creationId xmlns:a16="http://schemas.microsoft.com/office/drawing/2014/main" id="{E4916BAB-D9D7-47F0-90C4-006990CB6256}"/>
               </a:ext>
             </a:extLst>
           </p:cNvPr>
@@ -2548,7 +2548,7 @@
           <p:cNvPr id="4" name="">
             <a:extLst xmlns:a="http://schemas.openxmlformats.org/drawingml/2006/main">
               <a:ext uri="{FF2B5EF4-FFF2-40B4-BE49-F238E27FC236}">
-                <a16:creationId xmlns:a16="http://schemas.microsoft.com/office/drawing/2014/main" id="{6D5D9541-9711-4848-B8BD-44E20F63818B}"/>
+                <a16:creationId xmlns:a16="http://schemas.microsoft.com/office/drawing/2014/main" id="{75F31151-AE2D-4F51-8E28-1633A458AFCC}"/>
               </a:ext>
             </a:extLst>
           </p:cNvPr>
@@ -2605,7 +2605,7 @@
           <p:cNvPr id="5" name="">
             <a:extLst xmlns:a="http://schemas.openxmlformats.org/drawingml/2006/main">
               <a:ext uri="{FF2B5EF4-FFF2-40B4-BE49-F238E27FC236}">
-                <a16:creationId xmlns:a16="http://schemas.microsoft.com/office/drawing/2014/main" id="{0A96EE07-DD7F-4FDB-A9C4-7C1BF3E22939}"/>
+                <a16:creationId xmlns:a16="http://schemas.microsoft.com/office/drawing/2014/main" id="{9B6D2DC3-6B9D-49B7-B2F9-E653C3847592}"/>
               </a:ext>
             </a:extLst>
           </p:cNvPr>
@@ -2662,7 +2662,7 @@
           <p:cNvPr id="6" name="">
             <a:extLst xmlns:a="http://schemas.openxmlformats.org/drawingml/2006/main">
               <a:ext uri="{FF2B5EF4-FFF2-40B4-BE49-F238E27FC236}">
-                <a16:creationId xmlns:a16="http://schemas.microsoft.com/office/drawing/2014/main" id="{3EEA42C8-4256-47E2-A22E-93B72729F8AA}"/>
+                <a16:creationId xmlns:a16="http://schemas.microsoft.com/office/drawing/2014/main" id="{3D86AB23-5275-442D-9A24-94BF60C29C88}"/>
               </a:ext>
             </a:extLst>
           </p:cNvPr>
@@ -2719,7 +2719,7 @@
           <p:cNvPr id="7" name="">
             <a:extLst xmlns:a="http://schemas.openxmlformats.org/drawingml/2006/main">
               <a:ext uri="{FF2B5EF4-FFF2-40B4-BE49-F238E27FC236}">
-                <a16:creationId xmlns:a16="http://schemas.microsoft.com/office/drawing/2014/main" id="{6080663A-142A-47BC-A4DA-832D4E43764A}"/>
+                <a16:creationId xmlns:a16="http://schemas.microsoft.com/office/drawing/2014/main" id="{C36A5B2A-7F9A-45B9-BB9B-9FD251FE329B}"/>
               </a:ext>
             </a:extLst>
           </p:cNvPr>
@@ -2751,7 +2751,7 @@
           <p:cNvPr id="8" name="">
             <a:extLst xmlns:a="http://schemas.openxmlformats.org/drawingml/2006/main">
               <a:ext uri="{FF2B5EF4-FFF2-40B4-BE49-F238E27FC236}">
-                <a16:creationId xmlns:a16="http://schemas.microsoft.com/office/drawing/2014/main" id="{556D062A-A756-46F8-990E-543B1BA5C9CF}"/>
+                <a16:creationId xmlns:a16="http://schemas.microsoft.com/office/drawing/2014/main" id="{80F9DB13-EAD5-4C58-A974-B86F264AFA36}"/>
               </a:ext>
             </a:extLst>
           </p:cNvPr>
@@ -2808,7 +2808,7 @@
           <p:cNvPr id="9" name="">
             <a:extLst xmlns:a="http://schemas.openxmlformats.org/drawingml/2006/main">
               <a:ext uri="{FF2B5EF4-FFF2-40B4-BE49-F238E27FC236}">
-                <a16:creationId xmlns:a16="http://schemas.microsoft.com/office/drawing/2014/main" id="{5157F897-9FEB-4B7B-99A5-67D2ABF37148}"/>
+                <a16:creationId xmlns:a16="http://schemas.microsoft.com/office/drawing/2014/main" id="{1D64DC75-D926-4CD4-B779-D609C2043730}"/>
               </a:ext>
             </a:extLst>
           </p:cNvPr>
@@ -2865,7 +2865,7 @@
           <p:cNvPr id="10" name="">
             <a:extLst xmlns:a="http://schemas.openxmlformats.org/drawingml/2006/main">
               <a:ext uri="{FF2B5EF4-FFF2-40B4-BE49-F238E27FC236}">
-                <a16:creationId xmlns:a16="http://schemas.microsoft.com/office/drawing/2014/main" id="{CC515125-9D44-4234-B78B-251520E918FA}"/>
+                <a16:creationId xmlns:a16="http://schemas.microsoft.com/office/drawing/2014/main" id="{CA27BA6B-A117-43F2-BE92-0B3FCF665087}"/>
               </a:ext>
             </a:extLst>
           </p:cNvPr>
@@ -2922,7 +2922,7 @@
           <p:cNvPr id="11" name="">
             <a:extLst xmlns:a="http://schemas.openxmlformats.org/drawingml/2006/main">
               <a:ext uri="{FF2B5EF4-FFF2-40B4-BE49-F238E27FC236}">
-                <a16:creationId xmlns:a16="http://schemas.microsoft.com/office/drawing/2014/main" id="{3C396F22-51D1-4D28-BC6B-80C8E08DDB74}"/>
+                <a16:creationId xmlns:a16="http://schemas.microsoft.com/office/drawing/2014/main" id="{599AC382-4381-421A-9986-95169B840DCB}"/>
               </a:ext>
             </a:extLst>
           </p:cNvPr>
@@ -2979,7 +2979,7 @@
           <p:cNvPr id="12" name="">
             <a:extLst xmlns:a="http://schemas.openxmlformats.org/drawingml/2006/main">
               <a:ext uri="{FF2B5EF4-FFF2-40B4-BE49-F238E27FC236}">
-                <a16:creationId xmlns:a16="http://schemas.microsoft.com/office/drawing/2014/main" id="{5AA52248-40C3-4F3A-AA40-3B755E633D38}"/>
+                <a16:creationId xmlns:a16="http://schemas.microsoft.com/office/drawing/2014/main" id="{DABF949A-1980-4F11-A205-225EBD675DED}"/>
               </a:ext>
             </a:extLst>
           </p:cNvPr>
@@ -3036,7 +3036,7 @@
           <p:cNvPr id="13" name="">
             <a:extLst xmlns:a="http://schemas.openxmlformats.org/drawingml/2006/main">
               <a:ext uri="{FF2B5EF4-FFF2-40B4-BE49-F238E27FC236}">
-                <a16:creationId xmlns:a16="http://schemas.microsoft.com/office/drawing/2014/main" id="{DD6DE3F1-B0D6-448F-8189-DDA1FA0898D7}"/>
+                <a16:creationId xmlns:a16="http://schemas.microsoft.com/office/drawing/2014/main" id="{DB46D949-EE2B-413C-8C66-D0E2298C7779}"/>
               </a:ext>
             </a:extLst>
           </p:cNvPr>
@@ -3091,7 +3091,7 @@
     </p:spTree>
     <p:extLst>
       <p:ext uri="{BB962C8B-B14F-4D97-AF65-F5344CB8AC3E}">
-        <p14:creationId xmlns:p14="http://schemas.microsoft.com/office/powerpoint/2010/main" val="1359698615"/>
+        <p14:creationId xmlns:p14="http://schemas.microsoft.com/office/powerpoint/2010/main" val="539624551"/>
       </p:ext>
     </p:extLst>
   </p:cSld>
@@ -3292,7 +3292,7 @@
           <p:cNvPr id="19" name="">
             <a:extLst xmlns:a="http://schemas.openxmlformats.org/drawingml/2006/main">
               <a:ext uri="{FF2B5EF4-FFF2-40B4-BE49-F238E27FC236}">
-                <a16:creationId xmlns:a16="http://schemas.microsoft.com/office/drawing/2014/main" id="{836D4CC5-945C-41BA-8293-E865219C0D7C}"/>
+                <a16:creationId xmlns:a16="http://schemas.microsoft.com/office/drawing/2014/main" id="{B64314D5-C6AA-47B3-9C28-D14F058A6D3C}"/>
               </a:ext>
             </a:extLst>
           </p:cNvPr>
@@ -3324,7 +3324,7 @@
           <p:cNvPr id="2" name="">
             <a:extLst xmlns:a="http://schemas.openxmlformats.org/drawingml/2006/main">
               <a:ext uri="{FF2B5EF4-FFF2-40B4-BE49-F238E27FC236}">
-                <a16:creationId xmlns:a16="http://schemas.microsoft.com/office/drawing/2014/main" id="{D71305A8-7501-4049-9351-FE39C32E556C}"/>
+                <a16:creationId xmlns:a16="http://schemas.microsoft.com/office/drawing/2014/main" id="{7ADB60E9-B2B8-4794-8C52-80F8AC8AEA93}"/>
               </a:ext>
             </a:extLst>
           </p:cNvPr>
@@ -3381,7 +3381,7 @@
           <p:cNvPr id="3" name="">
             <a:extLst xmlns:a="http://schemas.openxmlformats.org/drawingml/2006/main">
               <a:ext uri="{FF2B5EF4-FFF2-40B4-BE49-F238E27FC236}">
-                <a16:creationId xmlns:a16="http://schemas.microsoft.com/office/drawing/2014/main" id="{F5A5C401-9F4D-4540-96B3-16D510F2B415}"/>
+                <a16:creationId xmlns:a16="http://schemas.microsoft.com/office/drawing/2014/main" id="{DE464836-35BC-4196-862D-68DF99311193}"/>
               </a:ext>
             </a:extLst>
           </p:cNvPr>
@@ -3413,7 +3413,7 @@
           <p:cNvPr id="4" name="">
             <a:extLst xmlns:a="http://schemas.openxmlformats.org/drawingml/2006/main">
               <a:ext uri="{FF2B5EF4-FFF2-40B4-BE49-F238E27FC236}">
-                <a16:creationId xmlns:a16="http://schemas.microsoft.com/office/drawing/2014/main" id="{2A230035-746E-44C3-ABA0-CB3597DD50AF}"/>
+                <a16:creationId xmlns:a16="http://schemas.microsoft.com/office/drawing/2014/main" id="{547FFD8A-2A49-4BF2-B162-61CA758706AB}"/>
               </a:ext>
             </a:extLst>
           </p:cNvPr>
@@ -3470,7 +3470,7 @@
           <p:cNvPr id="5" name="">
             <a:extLst xmlns:a="http://schemas.openxmlformats.org/drawingml/2006/main">
               <a:ext uri="{FF2B5EF4-FFF2-40B4-BE49-F238E27FC236}">
-                <a16:creationId xmlns:a16="http://schemas.microsoft.com/office/drawing/2014/main" id="{1D975751-71F8-42C0-A28D-7BB7EFA3A525}"/>
+                <a16:creationId xmlns:a16="http://schemas.microsoft.com/office/drawing/2014/main" id="{B4C280ED-F5AF-494F-B249-955930FDCF95}"/>
               </a:ext>
             </a:extLst>
           </p:cNvPr>
@@ -3527,7 +3527,7 @@
           <p:cNvPr id="6" name="">
             <a:extLst xmlns:a="http://schemas.openxmlformats.org/drawingml/2006/main">
               <a:ext uri="{FF2B5EF4-FFF2-40B4-BE49-F238E27FC236}">
-                <a16:creationId xmlns:a16="http://schemas.microsoft.com/office/drawing/2014/main" id="{D583590E-B6B7-4B79-810A-117E9DAC99A0}"/>
+                <a16:creationId xmlns:a16="http://schemas.microsoft.com/office/drawing/2014/main" id="{CFEA4F5F-4051-4B8E-9891-49BB4C72ACDD}"/>
               </a:ext>
             </a:extLst>
           </p:cNvPr>
@@ -3584,7 +3584,7 @@
           <p:cNvPr id="7" name="">
             <a:extLst xmlns:a="http://schemas.openxmlformats.org/drawingml/2006/main">
               <a:ext uri="{FF2B5EF4-FFF2-40B4-BE49-F238E27FC236}">
-                <a16:creationId xmlns:a16="http://schemas.microsoft.com/office/drawing/2014/main" id="{8E0E7F79-64EA-49E1-BCDC-2B26F9CD9B26}"/>
+                <a16:creationId xmlns:a16="http://schemas.microsoft.com/office/drawing/2014/main" id="{83C27FEA-39F8-433D-B1E6-6E38A143DC1D}"/>
               </a:ext>
             </a:extLst>
           </p:cNvPr>
@@ -3616,7 +3616,7 @@
           <p:cNvPr id="8" name="">
             <a:extLst xmlns:a="http://schemas.openxmlformats.org/drawingml/2006/main">
               <a:ext uri="{FF2B5EF4-FFF2-40B4-BE49-F238E27FC236}">
-                <a16:creationId xmlns:a16="http://schemas.microsoft.com/office/drawing/2014/main" id="{05F0E591-27AB-415D-A7FD-63D0240FC248}"/>
+                <a16:creationId xmlns:a16="http://schemas.microsoft.com/office/drawing/2014/main" id="{9F6197B7-0D85-4F8D-8453-32814CC46CD6}"/>
               </a:ext>
             </a:extLst>
           </p:cNvPr>
@@ -3673,7 +3673,7 @@
           <p:cNvPr id="9" name="">
             <a:extLst xmlns:a="http://schemas.openxmlformats.org/drawingml/2006/main">
               <a:ext uri="{FF2B5EF4-FFF2-40B4-BE49-F238E27FC236}">
-                <a16:creationId xmlns:a16="http://schemas.microsoft.com/office/drawing/2014/main" id="{356CA3F9-3EE0-4427-98F6-F070222F5545}"/>
+                <a16:creationId xmlns:a16="http://schemas.microsoft.com/office/drawing/2014/main" id="{15CFA43D-6BDC-41BF-9093-5009E870EC13}"/>
               </a:ext>
             </a:extLst>
           </p:cNvPr>
@@ -3730,7 +3730,7 @@
           <p:cNvPr id="10" name="">
             <a:extLst xmlns:a="http://schemas.openxmlformats.org/drawingml/2006/main">
               <a:ext uri="{FF2B5EF4-FFF2-40B4-BE49-F238E27FC236}">
-                <a16:creationId xmlns:a16="http://schemas.microsoft.com/office/drawing/2014/main" id="{8A0DDFF5-2262-4EC0-B591-0FC705BAA1DA}"/>
+                <a16:creationId xmlns:a16="http://schemas.microsoft.com/office/drawing/2014/main" id="{8B9683AF-06CC-4042-9530-48CBF1E584E0}"/>
               </a:ext>
             </a:extLst>
           </p:cNvPr>
@@ -3787,7 +3787,7 @@
           <p:cNvPr id="11" name="">
             <a:extLst xmlns:a="http://schemas.openxmlformats.org/drawingml/2006/main">
               <a:ext uri="{FF2B5EF4-FFF2-40B4-BE49-F238E27FC236}">
-                <a16:creationId xmlns:a16="http://schemas.microsoft.com/office/drawing/2014/main" id="{05BA8453-F3E4-48C2-97B9-F9E7B596EF1C}"/>
+                <a16:creationId xmlns:a16="http://schemas.microsoft.com/office/drawing/2014/main" id="{782A7D8C-77CC-4D42-893C-E7684ADA87CE}"/>
               </a:ext>
             </a:extLst>
           </p:cNvPr>
@@ -3821,7 +3821,7 @@
           <p:cNvPr id="12" name="">
             <a:extLst xmlns:a="http://schemas.openxmlformats.org/drawingml/2006/main">
               <a:ext uri="{FF2B5EF4-FFF2-40B4-BE49-F238E27FC236}">
-                <a16:creationId xmlns:a16="http://schemas.microsoft.com/office/drawing/2014/main" id="{E68E5DCB-F6E6-4FFE-BCA7-40C0A1D11022}"/>
+                <a16:creationId xmlns:a16="http://schemas.microsoft.com/office/drawing/2014/main" id="{CB72C03F-3C6D-46B7-A556-2C4BE0E44731}"/>
               </a:ext>
             </a:extLst>
           </p:cNvPr>
@@ -3878,7 +3878,7 @@
           <p:cNvPr id="13" name="">
             <a:extLst xmlns:a="http://schemas.openxmlformats.org/drawingml/2006/main">
               <a:ext uri="{FF2B5EF4-FFF2-40B4-BE49-F238E27FC236}">
-                <a16:creationId xmlns:a16="http://schemas.microsoft.com/office/drawing/2014/main" id="{FE0119CC-9355-4AFC-8ECF-EAEB4A2EE621}"/>
+                <a16:creationId xmlns:a16="http://schemas.microsoft.com/office/drawing/2014/main" id="{426BF7DF-F95C-4BB8-AE15-3555E95E8650}"/>
               </a:ext>
             </a:extLst>
           </p:cNvPr>
@@ -3935,7 +3935,7 @@
           <p:cNvPr id="14" name="">
             <a:extLst xmlns:a="http://schemas.openxmlformats.org/drawingml/2006/main">
               <a:ext uri="{FF2B5EF4-FFF2-40B4-BE49-F238E27FC236}">
-                <a16:creationId xmlns:a16="http://schemas.microsoft.com/office/drawing/2014/main" id="{5B2532EF-F80C-4D51-95BF-42A1BC8DC44F}"/>
+                <a16:creationId xmlns:a16="http://schemas.microsoft.com/office/drawing/2014/main" id="{1CB2CF44-19A0-424E-B9AF-2D15E58E815E}"/>
               </a:ext>
             </a:extLst>
           </p:cNvPr>
@@ -3992,7 +3992,7 @@
           <p:cNvPr id="15" name="">
             <a:extLst xmlns:a="http://schemas.openxmlformats.org/drawingml/2006/main">
               <a:ext uri="{FF2B5EF4-FFF2-40B4-BE49-F238E27FC236}">
-                <a16:creationId xmlns:a16="http://schemas.microsoft.com/office/drawing/2014/main" id="{D63369C3-0BB5-47B4-8237-7A538A47E931}"/>
+                <a16:creationId xmlns:a16="http://schemas.microsoft.com/office/drawing/2014/main" id="{D1D53845-A2F2-4B30-8E9E-40C6931B2D1A}"/>
               </a:ext>
             </a:extLst>
           </p:cNvPr>
@@ -4026,7 +4026,7 @@
           <p:cNvPr id="16" name="">
             <a:extLst xmlns:a="http://schemas.openxmlformats.org/drawingml/2006/main">
               <a:ext uri="{FF2B5EF4-FFF2-40B4-BE49-F238E27FC236}">
-                <a16:creationId xmlns:a16="http://schemas.microsoft.com/office/drawing/2014/main" id="{E29E7E4A-D692-4CA8-B345-1452274C4302}"/>
+                <a16:creationId xmlns:a16="http://schemas.microsoft.com/office/drawing/2014/main" id="{4EDA7C0F-56E7-467A-A168-EE486184E470}"/>
               </a:ext>
             </a:extLst>
           </p:cNvPr>
@@ -4083,7 +4083,7 @@
           <p:cNvPr id="17" name="">
             <a:extLst xmlns:a="http://schemas.openxmlformats.org/drawingml/2006/main">
               <a:ext uri="{FF2B5EF4-FFF2-40B4-BE49-F238E27FC236}">
-                <a16:creationId xmlns:a16="http://schemas.microsoft.com/office/drawing/2014/main" id="{C54EA599-24FE-41EA-B304-15A1EBD32D1F}"/>
+                <a16:creationId xmlns:a16="http://schemas.microsoft.com/office/drawing/2014/main" id="{C36CB691-C30B-4940-97FA-C367AAC8928F}"/>
               </a:ext>
             </a:extLst>
           </p:cNvPr>
@@ -4140,7 +4140,7 @@
           <p:cNvPr id="18" name="">
             <a:extLst xmlns:a="http://schemas.openxmlformats.org/drawingml/2006/main">
               <a:ext uri="{FF2B5EF4-FFF2-40B4-BE49-F238E27FC236}">
-                <a16:creationId xmlns:a16="http://schemas.microsoft.com/office/drawing/2014/main" id="{925F780A-1A4F-4A3C-BE72-9C97C6341CDE}"/>
+                <a16:creationId xmlns:a16="http://schemas.microsoft.com/office/drawing/2014/main" id="{6E260DE6-E75A-443A-B751-C04231124C40}"/>
               </a:ext>
             </a:extLst>
           </p:cNvPr>
@@ -4195,7 +4195,7 @@
     </p:spTree>
     <p:extLst>
       <p:ext uri="{BB962C8B-B14F-4D97-AF65-F5344CB8AC3E}">
-        <p14:creationId xmlns:p14="http://schemas.microsoft.com/office/powerpoint/2010/main" val="1020133640"/>
+        <p14:creationId xmlns:p14="http://schemas.microsoft.com/office/powerpoint/2010/main" val="889630509"/>
       </p:ext>
     </p:extLst>
   </p:cSld>
@@ -4350,7 +4350,7 @@
           <p:cNvPr id="23" name="">
             <a:extLst xmlns:a="http://schemas.openxmlformats.org/drawingml/2006/main">
               <a:ext uri="{FF2B5EF4-FFF2-40B4-BE49-F238E27FC236}">
-                <a16:creationId xmlns:a16="http://schemas.microsoft.com/office/drawing/2014/main" id="{B011A901-4072-4D55-8128-3ACB81AA25C2}"/>
+                <a16:creationId xmlns:a16="http://schemas.microsoft.com/office/drawing/2014/main" id="{B765DA20-BD78-4639-B84A-F2A9CA9D26BC}"/>
               </a:ext>
             </a:extLst>
           </p:cNvPr>
@@ -4382,7 +4382,7 @@
           <p:cNvPr id="2" name="">
             <a:extLst xmlns:a="http://schemas.openxmlformats.org/drawingml/2006/main">
               <a:ext uri="{FF2B5EF4-FFF2-40B4-BE49-F238E27FC236}">
-                <a16:creationId xmlns:a16="http://schemas.microsoft.com/office/drawing/2014/main" id="{9ECDC833-E0B7-4940-B7DB-F91328F760DB}"/>
+                <a16:creationId xmlns:a16="http://schemas.microsoft.com/office/drawing/2014/main" id="{5A8A9B4A-C991-4BAB-8A4E-AA55139BD57D}"/>
               </a:ext>
             </a:extLst>
           </p:cNvPr>
@@ -4439,7 +4439,7 @@
           <p:cNvPr id="3" name="">
             <a:extLst xmlns:a="http://schemas.openxmlformats.org/drawingml/2006/main">
               <a:ext uri="{FF2B5EF4-FFF2-40B4-BE49-F238E27FC236}">
-                <a16:creationId xmlns:a16="http://schemas.microsoft.com/office/drawing/2014/main" id="{CA822D8B-FC8E-405A-A33C-BFF2143BDDEE}"/>
+                <a16:creationId xmlns:a16="http://schemas.microsoft.com/office/drawing/2014/main" id="{08E891C1-4764-4531-8C52-1FAE4D1DFB83}"/>
               </a:ext>
             </a:extLst>
           </p:cNvPr>
@@ -4471,7 +4471,7 @@
           <p:cNvPr id="4" name="">
             <a:extLst xmlns:a="http://schemas.openxmlformats.org/drawingml/2006/main">
               <a:ext uri="{FF2B5EF4-FFF2-40B4-BE49-F238E27FC236}">
-                <a16:creationId xmlns:a16="http://schemas.microsoft.com/office/drawing/2014/main" id="{F32B2DE8-CA53-40C9-8DDF-94EA7995718E}"/>
+                <a16:creationId xmlns:a16="http://schemas.microsoft.com/office/drawing/2014/main" id="{2493A679-100B-4B30-A60F-E9CACA967249}"/>
               </a:ext>
             </a:extLst>
           </p:cNvPr>
@@ -4528,7 +4528,7 @@
           <p:cNvPr id="5" name="">
             <a:extLst xmlns:a="http://schemas.openxmlformats.org/drawingml/2006/main">
               <a:ext uri="{FF2B5EF4-FFF2-40B4-BE49-F238E27FC236}">
-                <a16:creationId xmlns:a16="http://schemas.microsoft.com/office/drawing/2014/main" id="{2BE2B6C4-965A-4B0E-A85B-4443D952DFA5}"/>
+                <a16:creationId xmlns:a16="http://schemas.microsoft.com/office/drawing/2014/main" id="{9992C5C7-9E21-4917-B4FF-4FA88EFDB823}"/>
               </a:ext>
             </a:extLst>
           </p:cNvPr>
@@ -4585,7 +4585,7 @@
           <p:cNvPr id="6" name="">
             <a:extLst xmlns:a="http://schemas.openxmlformats.org/drawingml/2006/main">
               <a:ext uri="{FF2B5EF4-FFF2-40B4-BE49-F238E27FC236}">
-                <a16:creationId xmlns:a16="http://schemas.microsoft.com/office/drawing/2014/main" id="{42BA2744-FE7F-4140-8FC0-07BF6A939D25}"/>
+                <a16:creationId xmlns:a16="http://schemas.microsoft.com/office/drawing/2014/main" id="{86D4195E-FA5B-42C3-8E15-3B931F8AD3B1}"/>
               </a:ext>
             </a:extLst>
           </p:cNvPr>
@@ -4642,7 +4642,7 @@
           <p:cNvPr id="7" name="">
             <a:extLst xmlns:a="http://schemas.openxmlformats.org/drawingml/2006/main">
               <a:ext uri="{FF2B5EF4-FFF2-40B4-BE49-F238E27FC236}">
-                <a16:creationId xmlns:a16="http://schemas.microsoft.com/office/drawing/2014/main" id="{BB163F7B-015D-4DCD-92AB-91D3CAF652C4}"/>
+                <a16:creationId xmlns:a16="http://schemas.microsoft.com/office/drawing/2014/main" id="{A65E1532-6843-46BA-8924-96D1D1F80893}"/>
               </a:ext>
             </a:extLst>
           </p:cNvPr>
@@ -4674,7 +4674,7 @@
           <p:cNvPr id="8" name="">
             <a:extLst xmlns:a="http://schemas.openxmlformats.org/drawingml/2006/main">
               <a:ext uri="{FF2B5EF4-FFF2-40B4-BE49-F238E27FC236}">
-                <a16:creationId xmlns:a16="http://schemas.microsoft.com/office/drawing/2014/main" id="{DE38D6DD-8026-4180-8DEE-86E5765255FB}"/>
+                <a16:creationId xmlns:a16="http://schemas.microsoft.com/office/drawing/2014/main" id="{862715E1-F2DB-4C33-B109-D80B49ADC9FA}"/>
               </a:ext>
             </a:extLst>
           </p:cNvPr>
@@ -4731,7 +4731,7 @@
           <p:cNvPr id="9" name="">
             <a:extLst xmlns:a="http://schemas.openxmlformats.org/drawingml/2006/main">
               <a:ext uri="{FF2B5EF4-FFF2-40B4-BE49-F238E27FC236}">
-                <a16:creationId xmlns:a16="http://schemas.microsoft.com/office/drawing/2014/main" id="{AC8B6CF3-A000-4441-89D7-6E7139469507}"/>
+                <a16:creationId xmlns:a16="http://schemas.microsoft.com/office/drawing/2014/main" id="{DBC67895-E0A1-4E39-A7F1-052679E353D8}"/>
               </a:ext>
             </a:extLst>
           </p:cNvPr>
@@ -4788,7 +4788,7 @@
           <p:cNvPr id="10" name="">
             <a:extLst xmlns:a="http://schemas.openxmlformats.org/drawingml/2006/main">
               <a:ext uri="{FF2B5EF4-FFF2-40B4-BE49-F238E27FC236}">
-                <a16:creationId xmlns:a16="http://schemas.microsoft.com/office/drawing/2014/main" id="{91D757BE-5C04-493D-A94A-3A793F443B8F}"/>
+                <a16:creationId xmlns:a16="http://schemas.microsoft.com/office/drawing/2014/main" id="{C723F523-CCDB-404D-B1E1-38B60A9DE54E}"/>
               </a:ext>
             </a:extLst>
           </p:cNvPr>
@@ -4822,7 +4822,7 @@
           <p:cNvPr id="11" name="">
             <a:extLst xmlns:a="http://schemas.openxmlformats.org/drawingml/2006/main">
               <a:ext uri="{FF2B5EF4-FFF2-40B4-BE49-F238E27FC236}">
-                <a16:creationId xmlns:a16="http://schemas.microsoft.com/office/drawing/2014/main" id="{4E50179C-085D-41B6-894A-0DD9696B3A00}"/>
+                <a16:creationId xmlns:a16="http://schemas.microsoft.com/office/drawing/2014/main" id="{A28048F1-2129-4725-B3AB-8F60F2C73ABF}"/>
               </a:ext>
             </a:extLst>
           </p:cNvPr>
@@ -4854,7 +4854,7 @@
           <p:cNvPr id="12" name="">
             <a:extLst xmlns:a="http://schemas.openxmlformats.org/drawingml/2006/main">
               <a:ext uri="{FF2B5EF4-FFF2-40B4-BE49-F238E27FC236}">
-                <a16:creationId xmlns:a16="http://schemas.microsoft.com/office/drawing/2014/main" id="{C7AD1CEC-2FD5-4DBA-BE92-933A191D9C75}"/>
+                <a16:creationId xmlns:a16="http://schemas.microsoft.com/office/drawing/2014/main" id="{FF16E69B-2B62-43D9-8F40-09FDDDFC949E}"/>
               </a:ext>
             </a:extLst>
           </p:cNvPr>
@@ -4911,7 +4911,7 @@
           <p:cNvPr id="13" name="">
             <a:extLst xmlns:a="http://schemas.openxmlformats.org/drawingml/2006/main">
               <a:ext uri="{FF2B5EF4-FFF2-40B4-BE49-F238E27FC236}">
-                <a16:creationId xmlns:a16="http://schemas.microsoft.com/office/drawing/2014/main" id="{F8DCC425-5836-4E7F-B611-F511178E31EF}"/>
+                <a16:creationId xmlns:a16="http://schemas.microsoft.com/office/drawing/2014/main" id="{CB66B03E-3E5F-410B-B3D3-52D81730E919}"/>
               </a:ext>
             </a:extLst>
           </p:cNvPr>
@@ -4968,7 +4968,7 @@
           <p:cNvPr id="14" name="">
             <a:extLst xmlns:a="http://schemas.openxmlformats.org/drawingml/2006/main">
               <a:ext uri="{FF2B5EF4-FFF2-40B4-BE49-F238E27FC236}">
-                <a16:creationId xmlns:a16="http://schemas.microsoft.com/office/drawing/2014/main" id="{EAF2F7CC-3A53-4892-8EAB-903AF1EE2ED2}"/>
+                <a16:creationId xmlns:a16="http://schemas.microsoft.com/office/drawing/2014/main" id="{50072AF9-14CA-452B-88EA-1D9338EBC561}"/>
               </a:ext>
             </a:extLst>
           </p:cNvPr>
@@ -5002,7 +5002,7 @@
           <p:cNvPr id="15" name="">
             <a:extLst xmlns:a="http://schemas.openxmlformats.org/drawingml/2006/main">
               <a:ext uri="{FF2B5EF4-FFF2-40B4-BE49-F238E27FC236}">
-                <a16:creationId xmlns:a16="http://schemas.microsoft.com/office/drawing/2014/main" id="{A54CD392-9733-41EA-937A-6D61B0B65565}"/>
+                <a16:creationId xmlns:a16="http://schemas.microsoft.com/office/drawing/2014/main" id="{6AEA399D-1C5C-4086-A2F7-D2F0FC181230}"/>
               </a:ext>
             </a:extLst>
           </p:cNvPr>
@@ -5034,7 +5034,7 @@
           <p:cNvPr id="16" name="">
             <a:extLst xmlns:a="http://schemas.openxmlformats.org/drawingml/2006/main">
               <a:ext uri="{FF2B5EF4-FFF2-40B4-BE49-F238E27FC236}">
-                <a16:creationId xmlns:a16="http://schemas.microsoft.com/office/drawing/2014/main" id="{2751E72B-AC31-4DAC-BF3B-4933A79FC2A1}"/>
+                <a16:creationId xmlns:a16="http://schemas.microsoft.com/office/drawing/2014/main" id="{A823569C-BC12-4AC0-95DF-A8A8F5B66D18}"/>
               </a:ext>
             </a:extLst>
           </p:cNvPr>
@@ -5091,7 +5091,7 @@
           <p:cNvPr id="17" name="">
             <a:extLst xmlns:a="http://schemas.openxmlformats.org/drawingml/2006/main">
               <a:ext uri="{FF2B5EF4-FFF2-40B4-BE49-F238E27FC236}">
-                <a16:creationId xmlns:a16="http://schemas.microsoft.com/office/drawing/2014/main" id="{6B35EE3B-44F1-4D21-B592-73FCA1AFAEB2}"/>
+                <a16:creationId xmlns:a16="http://schemas.microsoft.com/office/drawing/2014/main" id="{426A72D3-0552-46AD-B671-526610426DCA}"/>
               </a:ext>
             </a:extLst>
           </p:cNvPr>
@@ -5148,7 +5148,7 @@
           <p:cNvPr id="18" name="">
             <a:extLst xmlns:a="http://schemas.openxmlformats.org/drawingml/2006/main">
               <a:ext uri="{FF2B5EF4-FFF2-40B4-BE49-F238E27FC236}">
-                <a16:creationId xmlns:a16="http://schemas.microsoft.com/office/drawing/2014/main" id="{A33C2F96-7894-4F1D-BF8D-ACA2875F1BAF}"/>
+                <a16:creationId xmlns:a16="http://schemas.microsoft.com/office/drawing/2014/main" id="{D009E310-7C94-458F-8BFC-D74F141BFBF8}"/>
               </a:ext>
             </a:extLst>
           </p:cNvPr>
@@ -5182,7 +5182,7 @@
           <p:cNvPr id="19" name="">
             <a:extLst xmlns:a="http://schemas.openxmlformats.org/drawingml/2006/main">
               <a:ext uri="{FF2B5EF4-FFF2-40B4-BE49-F238E27FC236}">
-                <a16:creationId xmlns:a16="http://schemas.microsoft.com/office/drawing/2014/main" id="{62613053-4499-4107-BF05-DDECA7BB4F2A}"/>
+                <a16:creationId xmlns:a16="http://schemas.microsoft.com/office/drawing/2014/main" id="{B1917711-CBC3-43F5-B25F-198916691708}"/>
               </a:ext>
             </a:extLst>
           </p:cNvPr>
@@ -5214,7 +5214,7 @@
           <p:cNvPr id="20" name="">
             <a:extLst xmlns:a="http://schemas.openxmlformats.org/drawingml/2006/main">
               <a:ext uri="{FF2B5EF4-FFF2-40B4-BE49-F238E27FC236}">
-                <a16:creationId xmlns:a16="http://schemas.microsoft.com/office/drawing/2014/main" id="{278EA606-A1C1-4F5F-9D75-0CABDFBD5247}"/>
+                <a16:creationId xmlns:a16="http://schemas.microsoft.com/office/drawing/2014/main" id="{BA7355C2-0374-4929-BC1F-8D501580FB87}"/>
               </a:ext>
             </a:extLst>
           </p:cNvPr>
@@ -5271,7 +5271,7 @@
           <p:cNvPr id="21" name="">
             <a:extLst xmlns:a="http://schemas.openxmlformats.org/drawingml/2006/main">
               <a:ext uri="{FF2B5EF4-FFF2-40B4-BE49-F238E27FC236}">
-                <a16:creationId xmlns:a16="http://schemas.microsoft.com/office/drawing/2014/main" id="{D9851035-8842-4A52-ABEE-527B35DEEF6C}"/>
+                <a16:creationId xmlns:a16="http://schemas.microsoft.com/office/drawing/2014/main" id="{CB181381-EC8A-4406-9955-18E525CB4EDF}"/>
               </a:ext>
             </a:extLst>
           </p:cNvPr>
@@ -5328,7 +5328,7 @@
           <p:cNvPr id="22" name="">
             <a:extLst xmlns:a="http://schemas.openxmlformats.org/drawingml/2006/main">
               <a:ext uri="{FF2B5EF4-FFF2-40B4-BE49-F238E27FC236}">
-                <a16:creationId xmlns:a16="http://schemas.microsoft.com/office/drawing/2014/main" id="{10DC366F-3AAA-4555-889D-E7233BD95527}"/>
+                <a16:creationId xmlns:a16="http://schemas.microsoft.com/office/drawing/2014/main" id="{B95FFBDE-1FD8-40B7-9FCE-6A0881099218}"/>
               </a:ext>
             </a:extLst>
           </p:cNvPr>
@@ -5383,7 +5383,7 @@
     </p:spTree>
     <p:extLst>
       <p:ext uri="{BB962C8B-B14F-4D97-AF65-F5344CB8AC3E}">
-        <p14:creationId xmlns:p14="http://schemas.microsoft.com/office/powerpoint/2010/main" val="1577407334"/>
+        <p14:creationId xmlns:p14="http://schemas.microsoft.com/office/powerpoint/2010/main" val="295050249"/>
       </p:ext>
     </p:extLst>
   </p:cSld>
@@ -5584,7 +5584,7 @@
           <p:cNvPr id="23" name="">
             <a:extLst xmlns:a="http://schemas.openxmlformats.org/drawingml/2006/main">
               <a:ext uri="{FF2B5EF4-FFF2-40B4-BE49-F238E27FC236}">
-                <a16:creationId xmlns:a16="http://schemas.microsoft.com/office/drawing/2014/main" id="{B7B1EDAB-2441-416A-883B-6028E5596F70}"/>
+                <a16:creationId xmlns:a16="http://schemas.microsoft.com/office/drawing/2014/main" id="{D4A4295A-DD65-40BA-9991-A2E125D4FCB0}"/>
               </a:ext>
             </a:extLst>
           </p:cNvPr>
@@ -5616,7 +5616,7 @@
           <p:cNvPr id="2" name="">
             <a:extLst xmlns:a="http://schemas.openxmlformats.org/drawingml/2006/main">
               <a:ext uri="{FF2B5EF4-FFF2-40B4-BE49-F238E27FC236}">
-                <a16:creationId xmlns:a16="http://schemas.microsoft.com/office/drawing/2014/main" id="{8EDE3A06-7440-4027-91EE-0118EAF24910}"/>
+                <a16:creationId xmlns:a16="http://schemas.microsoft.com/office/drawing/2014/main" id="{933D20D2-C38C-43D1-AA5A-AD2BB7028229}"/>
               </a:ext>
             </a:extLst>
           </p:cNvPr>
@@ -5673,7 +5673,7 @@
           <p:cNvPr id="3" name="">
             <a:extLst xmlns:a="http://schemas.openxmlformats.org/drawingml/2006/main">
               <a:ext uri="{FF2B5EF4-FFF2-40B4-BE49-F238E27FC236}">
-                <a16:creationId xmlns:a16="http://schemas.microsoft.com/office/drawing/2014/main" id="{F5107B3A-DD01-4504-9327-E882B38BCA00}"/>
+                <a16:creationId xmlns:a16="http://schemas.microsoft.com/office/drawing/2014/main" id="{6608591E-41B0-4DF3-9CD3-CDFAF187FCFE}"/>
               </a:ext>
             </a:extLst>
           </p:cNvPr>
@@ -5705,7 +5705,7 @@
           <p:cNvPr id="4" name="">
             <a:extLst xmlns:a="http://schemas.openxmlformats.org/drawingml/2006/main">
               <a:ext uri="{FF2B5EF4-FFF2-40B4-BE49-F238E27FC236}">
-                <a16:creationId xmlns:a16="http://schemas.microsoft.com/office/drawing/2014/main" id="{00E74768-62D4-487B-A400-DCA1248AB9DF}"/>
+                <a16:creationId xmlns:a16="http://schemas.microsoft.com/office/drawing/2014/main" id="{D752437E-98D4-4A78-BAA0-D63BE007ACA2}"/>
               </a:ext>
             </a:extLst>
           </p:cNvPr>
@@ -5762,7 +5762,7 @@
           <p:cNvPr id="5" name="">
             <a:extLst xmlns:a="http://schemas.openxmlformats.org/drawingml/2006/main">
               <a:ext uri="{FF2B5EF4-FFF2-40B4-BE49-F238E27FC236}">
-                <a16:creationId xmlns:a16="http://schemas.microsoft.com/office/drawing/2014/main" id="{C9B08365-5D0F-4763-B001-AFE6F5B465AB}"/>
+                <a16:creationId xmlns:a16="http://schemas.microsoft.com/office/drawing/2014/main" id="{6A7C2303-E03F-4876-9160-3C10E07A5235}"/>
               </a:ext>
             </a:extLst>
           </p:cNvPr>
@@ -5819,7 +5819,7 @@
           <p:cNvPr id="6" name="">
             <a:extLst xmlns:a="http://schemas.openxmlformats.org/drawingml/2006/main">
               <a:ext uri="{FF2B5EF4-FFF2-40B4-BE49-F238E27FC236}">
-                <a16:creationId xmlns:a16="http://schemas.microsoft.com/office/drawing/2014/main" id="{D7DCB377-B0BB-4E66-B72B-166CC5295950}"/>
+                <a16:creationId xmlns:a16="http://schemas.microsoft.com/office/drawing/2014/main" id="{E4D47959-4905-494E-9C4F-42C23D611F4E}"/>
               </a:ext>
             </a:extLst>
           </p:cNvPr>
@@ -5876,7 +5876,7 @@
           <p:cNvPr id="7" name="">
             <a:extLst xmlns:a="http://schemas.openxmlformats.org/drawingml/2006/main">
               <a:ext uri="{FF2B5EF4-FFF2-40B4-BE49-F238E27FC236}">
-                <a16:creationId xmlns:a16="http://schemas.microsoft.com/office/drawing/2014/main" id="{1656E0D9-9312-4F65-ADF0-BB8769853AB2}"/>
+                <a16:creationId xmlns:a16="http://schemas.microsoft.com/office/drawing/2014/main" id="{C11037C8-B8A2-4338-8FF1-B8B1682B696F}"/>
               </a:ext>
             </a:extLst>
           </p:cNvPr>
@@ -5908,7 +5908,7 @@
           <p:cNvPr id="8" name="">
             <a:extLst xmlns:a="http://schemas.openxmlformats.org/drawingml/2006/main">
               <a:ext uri="{FF2B5EF4-FFF2-40B4-BE49-F238E27FC236}">
-                <a16:creationId xmlns:a16="http://schemas.microsoft.com/office/drawing/2014/main" id="{66EA2C6D-2C05-4825-A593-1386F06A4558}"/>
+                <a16:creationId xmlns:a16="http://schemas.microsoft.com/office/drawing/2014/main" id="{5C1E881D-96D8-407E-987F-6AD0277442EF}"/>
               </a:ext>
             </a:extLst>
           </p:cNvPr>
@@ -5965,7 +5965,7 @@
           <p:cNvPr id="9" name="">
             <a:extLst xmlns:a="http://schemas.openxmlformats.org/drawingml/2006/main">
               <a:ext uri="{FF2B5EF4-FFF2-40B4-BE49-F238E27FC236}">
-                <a16:creationId xmlns:a16="http://schemas.microsoft.com/office/drawing/2014/main" id="{9357D48A-4A5A-4D14-B8B1-AA65893AD8F7}"/>
+                <a16:creationId xmlns:a16="http://schemas.microsoft.com/office/drawing/2014/main" id="{5348232D-ED1A-4BAB-B18A-FBBC116FC613}"/>
               </a:ext>
             </a:extLst>
           </p:cNvPr>
@@ -6022,7 +6022,7 @@
           <p:cNvPr id="10" name="">
             <a:extLst xmlns:a="http://schemas.openxmlformats.org/drawingml/2006/main">
               <a:ext uri="{FF2B5EF4-FFF2-40B4-BE49-F238E27FC236}">
-                <a16:creationId xmlns:a16="http://schemas.microsoft.com/office/drawing/2014/main" id="{51F49048-8173-4BA8-8B76-FAA1026961A1}"/>
+                <a16:creationId xmlns:a16="http://schemas.microsoft.com/office/drawing/2014/main" id="{214ADBDB-3E4E-4A33-B83D-9416CE5D77F7}"/>
               </a:ext>
             </a:extLst>
           </p:cNvPr>
@@ -6056,7 +6056,7 @@
           <p:cNvPr id="11" name="">
             <a:extLst xmlns:a="http://schemas.openxmlformats.org/drawingml/2006/main">
               <a:ext uri="{FF2B5EF4-FFF2-40B4-BE49-F238E27FC236}">
-                <a16:creationId xmlns:a16="http://schemas.microsoft.com/office/drawing/2014/main" id="{734721B8-C966-4372-B93A-9F83816381DD}"/>
+                <a16:creationId xmlns:a16="http://schemas.microsoft.com/office/drawing/2014/main" id="{D654BEB2-4255-486E-8BB3-60A0256B72BB}"/>
               </a:ext>
             </a:extLst>
           </p:cNvPr>
@@ -6088,7 +6088,7 @@
           <p:cNvPr id="12" name="">
             <a:extLst xmlns:a="http://schemas.openxmlformats.org/drawingml/2006/main">
               <a:ext uri="{FF2B5EF4-FFF2-40B4-BE49-F238E27FC236}">
-                <a16:creationId xmlns:a16="http://schemas.microsoft.com/office/drawing/2014/main" id="{65055B20-A8C4-450A-B12A-4935F18A1686}"/>
+                <a16:creationId xmlns:a16="http://schemas.microsoft.com/office/drawing/2014/main" id="{F3C96FD7-8EC8-4DCB-9194-B3C9DBDC3941}"/>
               </a:ext>
             </a:extLst>
           </p:cNvPr>
@@ -6145,7 +6145,7 @@
           <p:cNvPr id="13" name="">
             <a:extLst xmlns:a="http://schemas.openxmlformats.org/drawingml/2006/main">
               <a:ext uri="{FF2B5EF4-FFF2-40B4-BE49-F238E27FC236}">
-                <a16:creationId xmlns:a16="http://schemas.microsoft.com/office/drawing/2014/main" id="{54F8C0C1-FC39-4895-8B4C-B95ABE24B42B}"/>
+                <a16:creationId xmlns:a16="http://schemas.microsoft.com/office/drawing/2014/main" id="{4AD7BE06-A780-4F6F-8740-06C1547D0F69}"/>
               </a:ext>
             </a:extLst>
           </p:cNvPr>
@@ -6202,7 +6202,7 @@
           <p:cNvPr id="14" name="">
             <a:extLst xmlns:a="http://schemas.openxmlformats.org/drawingml/2006/main">
               <a:ext uri="{FF2B5EF4-FFF2-40B4-BE49-F238E27FC236}">
-                <a16:creationId xmlns:a16="http://schemas.microsoft.com/office/drawing/2014/main" id="{BD8CCB1C-5AA5-45C3-9A7D-1A98989672CF}"/>
+                <a16:creationId xmlns:a16="http://schemas.microsoft.com/office/drawing/2014/main" id="{43645DF2-62C8-4340-A338-B7625F001A8A}"/>
               </a:ext>
             </a:extLst>
           </p:cNvPr>
@@ -6236,7 +6236,7 @@
           <p:cNvPr id="15" name="">
             <a:extLst xmlns:a="http://schemas.openxmlformats.org/drawingml/2006/main">
               <a:ext uri="{FF2B5EF4-FFF2-40B4-BE49-F238E27FC236}">
-                <a16:creationId xmlns:a16="http://schemas.microsoft.com/office/drawing/2014/main" id="{9CB09A76-DD9D-4457-8AC1-1C69C3189FD5}"/>
+                <a16:creationId xmlns:a16="http://schemas.microsoft.com/office/drawing/2014/main" id="{F998C6A5-A208-4FC5-9EC8-2646919FC17D}"/>
               </a:ext>
             </a:extLst>
           </p:cNvPr>
@@ -6268,7 +6268,7 @@
           <p:cNvPr id="16" name="">
             <a:extLst xmlns:a="http://schemas.openxmlformats.org/drawingml/2006/main">
               <a:ext uri="{FF2B5EF4-FFF2-40B4-BE49-F238E27FC236}">
-                <a16:creationId xmlns:a16="http://schemas.microsoft.com/office/drawing/2014/main" id="{AAFD18A3-E6A9-4028-B078-741964EFED0F}"/>
+                <a16:creationId xmlns:a16="http://schemas.microsoft.com/office/drawing/2014/main" id="{120DA093-A3E6-447C-8078-03669C345F8F}"/>
               </a:ext>
             </a:extLst>
           </p:cNvPr>
@@ -6325,7 +6325,7 @@
           <p:cNvPr id="17" name="">
             <a:extLst xmlns:a="http://schemas.openxmlformats.org/drawingml/2006/main">
               <a:ext uri="{FF2B5EF4-FFF2-40B4-BE49-F238E27FC236}">
-                <a16:creationId xmlns:a16="http://schemas.microsoft.com/office/drawing/2014/main" id="{BC2516AA-110F-45F3-807E-B25E265B026E}"/>
+                <a16:creationId xmlns:a16="http://schemas.microsoft.com/office/drawing/2014/main" id="{8C1F3961-53D4-4004-8EBB-0F410F1E2FF5}"/>
               </a:ext>
             </a:extLst>
           </p:cNvPr>
@@ -6382,7 +6382,7 @@
           <p:cNvPr id="18" name="">
             <a:extLst xmlns:a="http://schemas.openxmlformats.org/drawingml/2006/main">
               <a:ext uri="{FF2B5EF4-FFF2-40B4-BE49-F238E27FC236}">
-                <a16:creationId xmlns:a16="http://schemas.microsoft.com/office/drawing/2014/main" id="{FB23E4B4-CE89-4922-95CE-5C629A613C5C}"/>
+                <a16:creationId xmlns:a16="http://schemas.microsoft.com/office/drawing/2014/main" id="{B9415EAA-4D64-4989-B22F-842D1DB4B4D0}"/>
               </a:ext>
             </a:extLst>
           </p:cNvPr>
@@ -6416,7 +6416,7 @@
           <p:cNvPr id="19" name="">
             <a:extLst xmlns:a="http://schemas.openxmlformats.org/drawingml/2006/main">
               <a:ext uri="{FF2B5EF4-FFF2-40B4-BE49-F238E27FC236}">
-                <a16:creationId xmlns:a16="http://schemas.microsoft.com/office/drawing/2014/main" id="{4B9DA013-2458-402E-9828-7367B4706628}"/>
+                <a16:creationId xmlns:a16="http://schemas.microsoft.com/office/drawing/2014/main" id="{DA62E898-2EE1-4420-84E2-0C2DEB07AF36}"/>
               </a:ext>
             </a:extLst>
           </p:cNvPr>
@@ -6448,7 +6448,7 @@
           <p:cNvPr id="20" name="">
             <a:extLst xmlns:a="http://schemas.openxmlformats.org/drawingml/2006/main">
               <a:ext uri="{FF2B5EF4-FFF2-40B4-BE49-F238E27FC236}">
-                <a16:creationId xmlns:a16="http://schemas.microsoft.com/office/drawing/2014/main" id="{A9424B91-67FC-4F6F-A276-3C098CBE8A46}"/>
+                <a16:creationId xmlns:a16="http://schemas.microsoft.com/office/drawing/2014/main" id="{E68E4273-E267-4E43-879B-F6CE9F27A817}"/>
               </a:ext>
             </a:extLst>
           </p:cNvPr>
@@ -6505,7 +6505,7 @@
           <p:cNvPr id="21" name="">
             <a:extLst xmlns:a="http://schemas.openxmlformats.org/drawingml/2006/main">
               <a:ext uri="{FF2B5EF4-FFF2-40B4-BE49-F238E27FC236}">
-                <a16:creationId xmlns:a16="http://schemas.microsoft.com/office/drawing/2014/main" id="{BBEFE22C-8828-4E06-82B1-7C1AF80A75D1}"/>
+                <a16:creationId xmlns:a16="http://schemas.microsoft.com/office/drawing/2014/main" id="{47B5A81F-7D8C-4878-A5AD-19143CEE1D41}"/>
               </a:ext>
             </a:extLst>
           </p:cNvPr>
@@ -6562,7 +6562,7 @@
           <p:cNvPr id="22" name="">
             <a:extLst xmlns:a="http://schemas.openxmlformats.org/drawingml/2006/main">
               <a:ext uri="{FF2B5EF4-FFF2-40B4-BE49-F238E27FC236}">
-                <a16:creationId xmlns:a16="http://schemas.microsoft.com/office/drawing/2014/main" id="{EBA71F9D-7A80-45BF-A6F3-C142B54B82F9}"/>
+                <a16:creationId xmlns:a16="http://schemas.microsoft.com/office/drawing/2014/main" id="{35D92949-8585-4D98-979C-CB73A8032A0B}"/>
               </a:ext>
             </a:extLst>
           </p:cNvPr>
@@ -6617,7 +6617,7 @@
     </p:spTree>
     <p:extLst>
       <p:ext uri="{BB962C8B-B14F-4D97-AF65-F5344CB8AC3E}">
-        <p14:creationId xmlns:p14="http://schemas.microsoft.com/office/powerpoint/2010/main" val="864974365"/>
+        <p14:creationId xmlns:p14="http://schemas.microsoft.com/office/powerpoint/2010/main" val="689516442"/>
       </p:ext>
     </p:extLst>
   </p:cSld>
@@ -6818,7 +6818,7 @@
           <p:cNvPr id="16" name="">
             <a:extLst xmlns:a="http://schemas.openxmlformats.org/drawingml/2006/main">
               <a:ext uri="{FF2B5EF4-FFF2-40B4-BE49-F238E27FC236}">
-                <a16:creationId xmlns:a16="http://schemas.microsoft.com/office/drawing/2014/main" id="{A5B62ADB-A641-49CA-9787-ABDDC78C7ECF}"/>
+                <a16:creationId xmlns:a16="http://schemas.microsoft.com/office/drawing/2014/main" id="{EC462BB5-BEA8-4B11-A26F-D23A68CB9197}"/>
               </a:ext>
             </a:extLst>
           </p:cNvPr>
@@ -6850,7 +6850,7 @@
           <p:cNvPr id="2" name="">
             <a:extLst xmlns:a="http://schemas.openxmlformats.org/drawingml/2006/main">
               <a:ext uri="{FF2B5EF4-FFF2-40B4-BE49-F238E27FC236}">
-                <a16:creationId xmlns:a16="http://schemas.microsoft.com/office/drawing/2014/main" id="{140AA482-6C9D-4E5B-8D36-9EC20DAA5DA8}"/>
+                <a16:creationId xmlns:a16="http://schemas.microsoft.com/office/drawing/2014/main" id="{9826A8DD-BE7B-4C6D-A64D-30F3E4DAA83D}"/>
               </a:ext>
             </a:extLst>
           </p:cNvPr>
@@ -6907,7 +6907,7 @@
           <p:cNvPr id="3" name="">
             <a:extLst xmlns:a="http://schemas.openxmlformats.org/drawingml/2006/main">
               <a:ext uri="{FF2B5EF4-FFF2-40B4-BE49-F238E27FC236}">
-                <a16:creationId xmlns:a16="http://schemas.microsoft.com/office/drawing/2014/main" id="{E2687EF6-088E-48D1-8B7C-A160C54F0158}"/>
+                <a16:creationId xmlns:a16="http://schemas.microsoft.com/office/drawing/2014/main" id="{77B5FBAB-C2DA-4A2F-B914-24960233CE97}"/>
               </a:ext>
             </a:extLst>
           </p:cNvPr>
@@ -6939,7 +6939,7 @@
           <p:cNvPr id="4" name="">
             <a:extLst xmlns:a="http://schemas.openxmlformats.org/drawingml/2006/main">
               <a:ext uri="{FF2B5EF4-FFF2-40B4-BE49-F238E27FC236}">
-                <a16:creationId xmlns:a16="http://schemas.microsoft.com/office/drawing/2014/main" id="{72EF80CB-B588-4F2A-B28E-04E03C3FF245}"/>
+                <a16:creationId xmlns:a16="http://schemas.microsoft.com/office/drawing/2014/main" id="{22FC4F43-54D7-4F7A-AD74-56440B19BEDE}"/>
               </a:ext>
             </a:extLst>
           </p:cNvPr>
@@ -6996,7 +6996,7 @@
           <p:cNvPr id="5" name="">
             <a:extLst xmlns:a="http://schemas.openxmlformats.org/drawingml/2006/main">
               <a:ext uri="{FF2B5EF4-FFF2-40B4-BE49-F238E27FC236}">
-                <a16:creationId xmlns:a16="http://schemas.microsoft.com/office/drawing/2014/main" id="{23C4DE09-3BB5-4C77-ACA2-79904056A0DE}"/>
+                <a16:creationId xmlns:a16="http://schemas.microsoft.com/office/drawing/2014/main" id="{4C4A9874-75EE-4F6D-ADE1-60F7BAC68F7C}"/>
               </a:ext>
             </a:extLst>
           </p:cNvPr>
@@ -7053,7 +7053,7 @@
           <p:cNvPr id="6" name="">
             <a:extLst xmlns:a="http://schemas.openxmlformats.org/drawingml/2006/main">
               <a:ext uri="{FF2B5EF4-FFF2-40B4-BE49-F238E27FC236}">
-                <a16:creationId xmlns:a16="http://schemas.microsoft.com/office/drawing/2014/main" id="{CF2DAF7D-746D-45EE-B7A7-3FA6AC24151F}"/>
+                <a16:creationId xmlns:a16="http://schemas.microsoft.com/office/drawing/2014/main" id="{AB959777-8EA0-4E2C-9297-95E00B3327CA}"/>
               </a:ext>
             </a:extLst>
           </p:cNvPr>
@@ -7110,7 +7110,7 @@
           <p:cNvPr id="7" name="">
             <a:extLst xmlns:a="http://schemas.openxmlformats.org/drawingml/2006/main">
               <a:ext uri="{FF2B5EF4-FFF2-40B4-BE49-F238E27FC236}">
-                <a16:creationId xmlns:a16="http://schemas.microsoft.com/office/drawing/2014/main" id="{1B0F4359-E644-42FC-B16D-BBEF951A611F}"/>
+                <a16:creationId xmlns:a16="http://schemas.microsoft.com/office/drawing/2014/main" id="{86FC2CE3-8F6A-4934-8504-E35185C0ADF5}"/>
               </a:ext>
             </a:extLst>
           </p:cNvPr>
@@ -7142,7 +7142,7 @@
           <p:cNvPr id="8" name="">
             <a:extLst xmlns:a="http://schemas.openxmlformats.org/drawingml/2006/main">
               <a:ext uri="{FF2B5EF4-FFF2-40B4-BE49-F238E27FC236}">
-                <a16:creationId xmlns:a16="http://schemas.microsoft.com/office/drawing/2014/main" id="{CD822424-5286-42AE-B5A4-1D95BEF691CA}"/>
+                <a16:creationId xmlns:a16="http://schemas.microsoft.com/office/drawing/2014/main" id="{A8D0F7D2-1D34-40FB-A0A7-F9A95079F538}"/>
               </a:ext>
             </a:extLst>
           </p:cNvPr>
@@ -7199,7 +7199,7 @@
           <p:cNvPr id="9" name="">
             <a:extLst xmlns:a="http://schemas.openxmlformats.org/drawingml/2006/main">
               <a:ext uri="{FF2B5EF4-FFF2-40B4-BE49-F238E27FC236}">
-                <a16:creationId xmlns:a16="http://schemas.microsoft.com/office/drawing/2014/main" id="{7F943435-1F07-45ED-BDE2-AB4CEE38A89B}"/>
+                <a16:creationId xmlns:a16="http://schemas.microsoft.com/office/drawing/2014/main" id="{BB4FEEEC-5A43-4E90-9542-2B6B8F5C7CF1}"/>
               </a:ext>
             </a:extLst>
           </p:cNvPr>
@@ -7256,7 +7256,7 @@
           <p:cNvPr id="10" name="">
             <a:extLst xmlns:a="http://schemas.openxmlformats.org/drawingml/2006/main">
               <a:ext uri="{FF2B5EF4-FFF2-40B4-BE49-F238E27FC236}">
-                <a16:creationId xmlns:a16="http://schemas.microsoft.com/office/drawing/2014/main" id="{E0D54AF2-A1DE-422E-81A4-CDD8A38ABC03}"/>
+                <a16:creationId xmlns:a16="http://schemas.microsoft.com/office/drawing/2014/main" id="{D37E1EAD-178D-4410-8589-450E73F3DDC9}"/>
               </a:ext>
             </a:extLst>
           </p:cNvPr>
@@ -7313,7 +7313,7 @@
           <p:cNvPr id="11" name="">
             <a:extLst xmlns:a="http://schemas.openxmlformats.org/drawingml/2006/main">
               <a:ext uri="{FF2B5EF4-FFF2-40B4-BE49-F238E27FC236}">
-                <a16:creationId xmlns:a16="http://schemas.microsoft.com/office/drawing/2014/main" id="{F1CE6530-E71C-4468-84DE-82412665DBCC}"/>
+                <a16:creationId xmlns:a16="http://schemas.microsoft.com/office/drawing/2014/main" id="{D4974327-D2F0-40C2-B81E-3D6EDB1F6EC0}"/>
               </a:ext>
             </a:extLst>
           </p:cNvPr>
@@ -7345,7 +7345,7 @@
           <p:cNvPr id="12" name="">
             <a:extLst xmlns:a="http://schemas.openxmlformats.org/drawingml/2006/main">
               <a:ext uri="{FF2B5EF4-FFF2-40B4-BE49-F238E27FC236}">
-                <a16:creationId xmlns:a16="http://schemas.microsoft.com/office/drawing/2014/main" id="{599A80EE-2D44-4228-9FEF-C49A6AA9FC3F}"/>
+                <a16:creationId xmlns:a16="http://schemas.microsoft.com/office/drawing/2014/main" id="{D893EC2E-32DA-4714-8EDC-3735A3992073}"/>
               </a:ext>
             </a:extLst>
           </p:cNvPr>
@@ -7402,7 +7402,7 @@
           <p:cNvPr id="13" name="">
             <a:extLst xmlns:a="http://schemas.openxmlformats.org/drawingml/2006/main">
               <a:ext uri="{FF2B5EF4-FFF2-40B4-BE49-F238E27FC236}">
-                <a16:creationId xmlns:a16="http://schemas.microsoft.com/office/drawing/2014/main" id="{72D9EE1D-913F-4EAA-82F2-B4DA7317B4F0}"/>
+                <a16:creationId xmlns:a16="http://schemas.microsoft.com/office/drawing/2014/main" id="{28006FD6-0251-4A5C-A970-098CB7D46759}"/>
               </a:ext>
             </a:extLst>
           </p:cNvPr>
@@ -7459,7 +7459,7 @@
           <p:cNvPr id="14" name="">
             <a:extLst xmlns:a="http://schemas.openxmlformats.org/drawingml/2006/main">
               <a:ext uri="{FF2B5EF4-FFF2-40B4-BE49-F238E27FC236}">
-                <a16:creationId xmlns:a16="http://schemas.microsoft.com/office/drawing/2014/main" id="{FDE14A27-58F1-4506-9C73-D885FA0DC17D}"/>
+                <a16:creationId xmlns:a16="http://schemas.microsoft.com/office/drawing/2014/main" id="{BF60D55C-F8CA-4988-8E7B-EF5353B79815}"/>
               </a:ext>
             </a:extLst>
           </p:cNvPr>
@@ -7516,7 +7516,7 @@
           <p:cNvPr id="15" name="">
             <a:extLst xmlns:a="http://schemas.openxmlformats.org/drawingml/2006/main">
               <a:ext uri="{FF2B5EF4-FFF2-40B4-BE49-F238E27FC236}">
-                <a16:creationId xmlns:a16="http://schemas.microsoft.com/office/drawing/2014/main" id="{6403AB23-1CAC-46CA-A6C2-0BAACB2CD92D}"/>
+                <a16:creationId xmlns:a16="http://schemas.microsoft.com/office/drawing/2014/main" id="{DAAB0143-8F9C-4915-B2EF-AC62AF0988A3}"/>
               </a:ext>
             </a:extLst>
           </p:cNvPr>
@@ -7571,7 +7571,7 @@
     </p:spTree>
     <p:extLst>
       <p:ext uri="{BB962C8B-B14F-4D97-AF65-F5344CB8AC3E}">
-        <p14:creationId xmlns:p14="http://schemas.microsoft.com/office/powerpoint/2010/main" val="63712051"/>
+        <p14:creationId xmlns:p14="http://schemas.microsoft.com/office/powerpoint/2010/main" val="447612638"/>
       </p:ext>
     </p:extLst>
   </p:cSld>
@@ -7769,10 +7769,10 @@
       </p:grpSpPr>
       <p:sp>
         <p:nvSpPr>
-          <p:cNvPr id="23" name="">
-            <a:extLst xmlns:a="http://schemas.openxmlformats.org/drawingml/2006/main">
-              <a:ext uri="{FF2B5EF4-FFF2-40B4-BE49-F238E27FC236}">
-                <a16:creationId xmlns:a16="http://schemas.microsoft.com/office/drawing/2014/main" id="{FF672B0C-9708-401A-9CDD-81C4B9B80107}"/>
+          <p:cNvPr id="26" name="">
+            <a:extLst xmlns:a="http://schemas.openxmlformats.org/drawingml/2006/main">
+              <a:ext uri="{FF2B5EF4-FFF2-40B4-BE49-F238E27FC236}">
+                <a16:creationId xmlns:a16="http://schemas.microsoft.com/office/drawing/2014/main" id="{B0E5E7A1-17C5-4DBB-BB40-5A3DCAA9442F}"/>
               </a:ext>
             </a:extLst>
           </p:cNvPr>
@@ -7804,7 +7804,7 @@
           <p:cNvPr id="2" name="">
             <a:extLst xmlns:a="http://schemas.openxmlformats.org/drawingml/2006/main">
               <a:ext uri="{FF2B5EF4-FFF2-40B4-BE49-F238E27FC236}">
-                <a16:creationId xmlns:a16="http://schemas.microsoft.com/office/drawing/2014/main" id="{3D12E37E-F48A-4AE5-8C7F-5F17C87E4868}"/>
+                <a16:creationId xmlns:a16="http://schemas.microsoft.com/office/drawing/2014/main" id="{79261497-B465-427E-9B2C-E88B0096A30E}"/>
               </a:ext>
             </a:extLst>
           </p:cNvPr>
@@ -7861,7 +7861,7 @@
           <p:cNvPr id="3" name="">
             <a:extLst xmlns:a="http://schemas.openxmlformats.org/drawingml/2006/main">
               <a:ext uri="{FF2B5EF4-FFF2-40B4-BE49-F238E27FC236}">
-                <a16:creationId xmlns:a16="http://schemas.microsoft.com/office/drawing/2014/main" id="{2A503BD5-964A-4068-BA3A-E29EABCE1E59}"/>
+                <a16:creationId xmlns:a16="http://schemas.microsoft.com/office/drawing/2014/main" id="{91BDFA2D-EE5D-43AD-B30C-46A558669418}"/>
               </a:ext>
             </a:extLst>
           </p:cNvPr>
@@ -7893,7 +7893,7 @@
           <p:cNvPr id="4" name="">
             <a:extLst xmlns:a="http://schemas.openxmlformats.org/drawingml/2006/main">
               <a:ext uri="{FF2B5EF4-FFF2-40B4-BE49-F238E27FC236}">
-                <a16:creationId xmlns:a16="http://schemas.microsoft.com/office/drawing/2014/main" id="{73EB70FE-776E-4BF2-ABB2-BC914A6ABE7B}"/>
+                <a16:creationId xmlns:a16="http://schemas.microsoft.com/office/drawing/2014/main" id="{D4E5D6E6-E621-4CE3-A6E3-A21A84CE3977}"/>
               </a:ext>
             </a:extLst>
           </p:cNvPr>
@@ -7950,7 +7950,7 @@
           <p:cNvPr id="5" name="">
             <a:extLst xmlns:a="http://schemas.openxmlformats.org/drawingml/2006/main">
               <a:ext uri="{FF2B5EF4-FFF2-40B4-BE49-F238E27FC236}">
-                <a16:creationId xmlns:a16="http://schemas.microsoft.com/office/drawing/2014/main" id="{890E150B-B795-4FDD-A728-2195F18C0383}"/>
+                <a16:creationId xmlns:a16="http://schemas.microsoft.com/office/drawing/2014/main" id="{7F0C663E-4837-4328-AC49-6260B6C6FBD1}"/>
               </a:ext>
             </a:extLst>
           </p:cNvPr>
@@ -8007,7 +8007,7 @@
           <p:cNvPr id="6" name="">
             <a:extLst xmlns:a="http://schemas.openxmlformats.org/drawingml/2006/main">
               <a:ext uri="{FF2B5EF4-FFF2-40B4-BE49-F238E27FC236}">
-                <a16:creationId xmlns:a16="http://schemas.microsoft.com/office/drawing/2014/main" id="{E3982693-15B0-4F79-93A7-E21F7C8A7589}"/>
+                <a16:creationId xmlns:a16="http://schemas.microsoft.com/office/drawing/2014/main" id="{E20DDC49-9AE4-4ED9-8E7C-FBF832E364AD}"/>
               </a:ext>
             </a:extLst>
           </p:cNvPr>
@@ -8064,7 +8064,7 @@
           <p:cNvPr id="7" name="">
             <a:extLst xmlns:a="http://schemas.openxmlformats.org/drawingml/2006/main">
               <a:ext uri="{FF2B5EF4-FFF2-40B4-BE49-F238E27FC236}">
-                <a16:creationId xmlns:a16="http://schemas.microsoft.com/office/drawing/2014/main" id="{F351B1B4-CA86-494C-82CA-6794E122CDB8}"/>
+                <a16:creationId xmlns:a16="http://schemas.microsoft.com/office/drawing/2014/main" id="{C0B39A97-3C1B-403C-83B9-D613A8099DC0}"/>
               </a:ext>
             </a:extLst>
           </p:cNvPr>
@@ -8096,7 +8096,7 @@
           <p:cNvPr id="8" name="">
             <a:extLst xmlns:a="http://schemas.openxmlformats.org/drawingml/2006/main">
               <a:ext uri="{FF2B5EF4-FFF2-40B4-BE49-F238E27FC236}">
-                <a16:creationId xmlns:a16="http://schemas.microsoft.com/office/drawing/2014/main" id="{8A541FFA-2DFF-496C-9777-9DE136D7B790}"/>
+                <a16:creationId xmlns:a16="http://schemas.microsoft.com/office/drawing/2014/main" id="{9C4C6A2E-B851-4BAD-8DD9-86242B7BDED3}"/>
               </a:ext>
             </a:extLst>
           </p:cNvPr>
@@ -8153,7 +8153,7 @@
           <p:cNvPr id="9" name="">
             <a:extLst xmlns:a="http://schemas.openxmlformats.org/drawingml/2006/main">
               <a:ext uri="{FF2B5EF4-FFF2-40B4-BE49-F238E27FC236}">
-                <a16:creationId xmlns:a16="http://schemas.microsoft.com/office/drawing/2014/main" id="{B4C37520-1E85-4120-882D-3AB0AB7F2435}"/>
+                <a16:creationId xmlns:a16="http://schemas.microsoft.com/office/drawing/2014/main" id="{2A817C7F-CB8D-4253-91FF-F7F08FB3554D}"/>
               </a:ext>
             </a:extLst>
           </p:cNvPr>
@@ -8210,19 +8210,19 @@
           <p:cNvPr id="10" name="">
             <a:extLst xmlns:a="http://schemas.openxmlformats.org/drawingml/2006/main">
               <a:ext uri="{FF2B5EF4-FFF2-40B4-BE49-F238E27FC236}">
-                <a16:creationId xmlns:a16="http://schemas.microsoft.com/office/drawing/2014/main" id="{B39D104C-6521-4025-AA81-BE4D1061EEF9}"/>
-              </a:ext>
-            </a:extLst>
-          </p:cNvPr>
-          <p:cNvSpPr>
-            <a:spLocks xmlns:a="http://schemas.openxmlformats.org/drawingml/2006/main" noGrp="1"/>
-          </p:cNvSpPr>
-          <p:nvPr/>
-        </p:nvSpPr>
-        <p:spPr>
-          <a:xfrm xmlns:a="http://schemas.openxmlformats.org/drawingml/2006/main">
-            <a:off x="914400" y="1257300"/>
-            <a:ext cx="10363200" cy="781050"/>
+                <a16:creationId xmlns:a16="http://schemas.microsoft.com/office/drawing/2014/main" id="{328BAFEE-EFB8-4EC5-82DA-877B721759B4}"/>
+              </a:ext>
+            </a:extLst>
+          </p:cNvPr>
+          <p:cNvSpPr>
+            <a:spLocks xmlns:a="http://schemas.openxmlformats.org/drawingml/2006/main" noGrp="1"/>
+          </p:cNvSpPr>
+          <p:nvPr/>
+        </p:nvSpPr>
+        <p:spPr>
+          <a:xfrm xmlns:a="http://schemas.openxmlformats.org/drawingml/2006/main">
+            <a:off x="857250" y="1219200"/>
+            <a:ext cx="10477500" cy="742950"/>
           </a:xfrm>
           <a:prstGeom xmlns:a="http://schemas.openxmlformats.org/drawingml/2006/main" prst="rect">
             <a:avLst/>
@@ -8239,7 +8239,7 @@
           <a:lstStyle xmlns:a="http://schemas.openxmlformats.org/drawingml/2006/main"/>
           <a:p xmlns:a="http://schemas.openxmlformats.org/drawingml/2006/main">
             <a:pPr algn="ctr">
-              <a:defRPr sz="2175" b="1">
+              <a:defRPr sz="2100" b="1">
                 <a:solidFill>
                   <a:srgbClr val="17253A"/>
                 </a:solidFill>
@@ -8249,7 +8249,7 @@
               </a:defRPr>
             </a:pPr>
             <a:r>
-              <a:rPr sz="2175" b="1">
+              <a:rPr sz="2100" b="1">
                 <a:solidFill>
                   <a:srgbClr val="17253A"/>
                 </a:solidFill>
@@ -8267,28 +8267,30 @@
           <p:cNvPr id="11" name="">
             <a:extLst xmlns:a="http://schemas.openxmlformats.org/drawingml/2006/main">
               <a:ext uri="{FF2B5EF4-FFF2-40B4-BE49-F238E27FC236}">
-                <a16:creationId xmlns:a16="http://schemas.microsoft.com/office/drawing/2014/main" id="{D3890F9F-2EE4-4A53-8679-1153FA642A53}"/>
-              </a:ext>
-            </a:extLst>
-          </p:cNvPr>
-          <p:cNvSpPr>
-            <a:spLocks xmlns:a="http://schemas.openxmlformats.org/drawingml/2006/main" noGrp="1"/>
-          </p:cNvSpPr>
-          <p:nvPr/>
-        </p:nvSpPr>
-        <p:spPr>
-          <a:xfrm xmlns:a="http://schemas.openxmlformats.org/drawingml/2006/main">
-            <a:off x="1000125" y="2247900"/>
-            <a:ext cx="476250" cy="476250"/>
-          </a:xfrm>
-          <a:prstGeom xmlns:a="http://schemas.openxmlformats.org/drawingml/2006/main" prst="ellipse">
+                <a16:creationId xmlns:a16="http://schemas.microsoft.com/office/drawing/2014/main" id="{29F5EFD0-CBBB-4982-82FF-FF6A7F04589E}"/>
+              </a:ext>
+            </a:extLst>
+          </p:cNvPr>
+          <p:cNvSpPr>
+            <a:spLocks xmlns:a="http://schemas.openxmlformats.org/drawingml/2006/main" noGrp="1"/>
+          </p:cNvSpPr>
+          <p:nvPr/>
+        </p:nvSpPr>
+        <p:spPr>
+          <a:xfrm xmlns:a="http://schemas.openxmlformats.org/drawingml/2006/main">
+            <a:off x="971550" y="2124075"/>
+            <a:ext cx="38100" cy="3524250"/>
+          </a:xfrm>
+          <a:prstGeom xmlns:a="http://schemas.openxmlformats.org/drawingml/2006/main" prst="rect">
             <a:avLst/>
           </a:prstGeom>
           <a:solidFill xmlns:a="http://schemas.openxmlformats.org/drawingml/2006/main">
-            <a:srgbClr val="18324A"/>
+            <a:srgbClr val="2C6E73"/>
           </a:solidFill>
           <a:ln xmlns:a="http://schemas.openxmlformats.org/drawingml/2006/main" w="0">
-            <a:noFill/>
+            <a:solidFill>
+              <a:srgbClr val="2C6E73"/>
+            </a:solidFill>
           </a:ln>
         </p:spPr>
       </p:sp>
@@ -8297,19 +8299,19 @@
           <p:cNvPr id="12" name="">
             <a:extLst xmlns:a="http://schemas.openxmlformats.org/drawingml/2006/main">
               <a:ext uri="{FF2B5EF4-FFF2-40B4-BE49-F238E27FC236}">
-                <a16:creationId xmlns:a16="http://schemas.microsoft.com/office/drawing/2014/main" id="{87176C23-6B0A-4E3F-85AD-8CDA18A60B8E}"/>
-              </a:ext>
-            </a:extLst>
-          </p:cNvPr>
-          <p:cNvSpPr>
-            <a:spLocks xmlns:a="http://schemas.openxmlformats.org/drawingml/2006/main" noGrp="1"/>
-          </p:cNvSpPr>
-          <p:nvPr/>
-        </p:nvSpPr>
-        <p:spPr>
-          <a:xfrm xmlns:a="http://schemas.openxmlformats.org/drawingml/2006/main">
-            <a:off x="1000125" y="2276475"/>
-            <a:ext cx="476250" cy="419100"/>
+                <a16:creationId xmlns:a16="http://schemas.microsoft.com/office/drawing/2014/main" id="{765E1508-7DF8-4225-91F4-21A88D406A38}"/>
+              </a:ext>
+            </a:extLst>
+          </p:cNvPr>
+          <p:cNvSpPr>
+            <a:spLocks xmlns:a="http://schemas.openxmlformats.org/drawingml/2006/main" noGrp="1"/>
+          </p:cNvSpPr>
+          <p:nvPr/>
+        </p:nvSpPr>
+        <p:spPr>
+          <a:xfrm xmlns:a="http://schemas.openxmlformats.org/drawingml/2006/main">
+            <a:off x="1162050" y="2200275"/>
+            <a:ext cx="400050" cy="400050"/>
           </a:xfrm>
           <a:prstGeom xmlns:a="http://schemas.openxmlformats.org/drawingml/2006/main" prst="rect">
             <a:avLst/>
@@ -8326,9 +8328,9 @@
           <a:lstStyle xmlns:a="http://schemas.openxmlformats.org/drawingml/2006/main"/>
           <a:p xmlns:a="http://schemas.openxmlformats.org/drawingml/2006/main">
             <a:pPr algn="ctr">
-              <a:defRPr sz="1350" b="1">
-                <a:solidFill>
-                  <a:srgbClr val="FFFFFF"/>
+              <a:defRPr sz="1125" b="1">
+                <a:solidFill>
+                  <a:srgbClr val="2C6E73"/>
                 </a:solidFill>
                 <a:latin typeface="Arial"/>
                 <a:ea typeface="Arial"/>
@@ -8336,9 +8338,9 @@
               </a:defRPr>
             </a:pPr>
             <a:r>
-              <a:rPr sz="1350" b="1">
-                <a:solidFill>
-                  <a:srgbClr val="FFFFFF"/>
+              <a:rPr sz="1125" b="1">
+                <a:solidFill>
+                  <a:srgbClr val="2C6E73"/>
                 </a:solidFill>
                 <a:latin typeface="Arial"/>
                 <a:ea typeface="Arial"/>
@@ -8354,19 +8356,19 @@
           <p:cNvPr id="13" name="">
             <a:extLst xmlns:a="http://schemas.openxmlformats.org/drawingml/2006/main">
               <a:ext uri="{FF2B5EF4-FFF2-40B4-BE49-F238E27FC236}">
-                <a16:creationId xmlns:a16="http://schemas.microsoft.com/office/drawing/2014/main" id="{35C1504B-0712-4757-8B7B-560F415A01B0}"/>
-              </a:ext>
-            </a:extLst>
-          </p:cNvPr>
-          <p:cNvSpPr>
-            <a:spLocks xmlns:a="http://schemas.openxmlformats.org/drawingml/2006/main" noGrp="1"/>
-          </p:cNvSpPr>
-          <p:nvPr/>
-        </p:nvSpPr>
-        <p:spPr>
-          <a:xfrm xmlns:a="http://schemas.openxmlformats.org/drawingml/2006/main">
-            <a:off x="1714500" y="2181225"/>
-            <a:ext cx="9429750" cy="609600"/>
+                <a16:creationId xmlns:a16="http://schemas.microsoft.com/office/drawing/2014/main" id="{4B12B971-19D3-481C-B667-FFBFCFCD7C8F}"/>
+              </a:ext>
+            </a:extLst>
+          </p:cNvPr>
+          <p:cNvSpPr>
+            <a:spLocks xmlns:a="http://schemas.openxmlformats.org/drawingml/2006/main" noGrp="1"/>
+          </p:cNvSpPr>
+          <p:nvPr/>
+        </p:nvSpPr>
+        <p:spPr>
+          <a:xfrm xmlns:a="http://schemas.openxmlformats.org/drawingml/2006/main">
+            <a:off x="1714500" y="2114550"/>
+            <a:ext cx="9525000" cy="638175"/>
           </a:xfrm>
           <a:prstGeom xmlns:a="http://schemas.openxmlformats.org/drawingml/2006/main" prst="rect">
             <a:avLst/>
@@ -8383,7 +8385,7 @@
           <a:lstStyle xmlns:a="http://schemas.openxmlformats.org/drawingml/2006/main"/>
           <a:p xmlns:a="http://schemas.openxmlformats.org/drawingml/2006/main">
             <a:pPr algn="l">
-              <a:defRPr sz="1500" b="0">
+              <a:defRPr sz="1575" b="0">
                 <a:solidFill>
                   <a:srgbClr val="17253A"/>
                 </a:solidFill>
@@ -8393,7 +8395,7 @@
               </a:defRPr>
             </a:pPr>
             <a:r>
-              <a:rPr sz="1500" b="0">
+              <a:rPr sz="1575" b="0">
                 <a:solidFill>
                   <a:srgbClr val="17253A"/>
                 </a:solidFill>
@@ -8401,7 +8403,7 @@
                 <a:ea typeface="Arial"/>
                 <a:cs typeface="Arial"/>
               </a:rPr>
-              <a:t>Identify the structure: Identify brackets and multiplication or division before calculating.</a:t>
+              <a:t>7 × (20 + 3)</a:t>
             </a:r>
           </a:p>
         </p:txBody>
@@ -8411,28 +8413,30 @@
           <p:cNvPr id="14" name="">
             <a:extLst xmlns:a="http://schemas.openxmlformats.org/drawingml/2006/main">
               <a:ext uri="{FF2B5EF4-FFF2-40B4-BE49-F238E27FC236}">
-                <a16:creationId xmlns:a16="http://schemas.microsoft.com/office/drawing/2014/main" id="{7348C433-18E8-4FB8-A294-33E9AFE9F9D5}"/>
-              </a:ext>
-            </a:extLst>
-          </p:cNvPr>
-          <p:cNvSpPr>
-            <a:spLocks xmlns:a="http://schemas.openxmlformats.org/drawingml/2006/main" noGrp="1"/>
-          </p:cNvSpPr>
-          <p:nvPr/>
-        </p:nvSpPr>
-        <p:spPr>
-          <a:xfrm xmlns:a="http://schemas.openxmlformats.org/drawingml/2006/main">
-            <a:off x="1000125" y="2990850"/>
-            <a:ext cx="476250" cy="476250"/>
-          </a:xfrm>
-          <a:prstGeom xmlns:a="http://schemas.openxmlformats.org/drawingml/2006/main" prst="ellipse">
+                <a16:creationId xmlns:a16="http://schemas.microsoft.com/office/drawing/2014/main" id="{1FCA9E02-D0C9-4964-B0D3-B473FA7ED89E}"/>
+              </a:ext>
+            </a:extLst>
+          </p:cNvPr>
+          <p:cNvSpPr>
+            <a:spLocks xmlns:a="http://schemas.openxmlformats.org/drawingml/2006/main" noGrp="1"/>
+          </p:cNvSpPr>
+          <p:nvPr/>
+        </p:nvSpPr>
+        <p:spPr>
+          <a:xfrm xmlns:a="http://schemas.openxmlformats.org/drawingml/2006/main">
+            <a:off x="1714500" y="2771775"/>
+            <a:ext cx="9334500" cy="9525"/>
+          </a:xfrm>
+          <a:prstGeom xmlns:a="http://schemas.openxmlformats.org/drawingml/2006/main" prst="rect">
             <a:avLst/>
           </a:prstGeom>
           <a:solidFill xmlns:a="http://schemas.openxmlformats.org/drawingml/2006/main">
-            <a:srgbClr val="2C6E73"/>
+            <a:srgbClr val="D9E0E6"/>
           </a:solidFill>
           <a:ln xmlns:a="http://schemas.openxmlformats.org/drawingml/2006/main" w="0">
-            <a:noFill/>
+            <a:solidFill>
+              <a:srgbClr val="D9E0E6"/>
+            </a:solidFill>
           </a:ln>
         </p:spPr>
       </p:sp>
@@ -8441,19 +8445,19 @@
           <p:cNvPr id="15" name="">
             <a:extLst xmlns:a="http://schemas.openxmlformats.org/drawingml/2006/main">
               <a:ext uri="{FF2B5EF4-FFF2-40B4-BE49-F238E27FC236}">
-                <a16:creationId xmlns:a16="http://schemas.microsoft.com/office/drawing/2014/main" id="{A0E4E8CF-108B-40B5-AF7A-96EC390B3B9F}"/>
-              </a:ext>
-            </a:extLst>
-          </p:cNvPr>
-          <p:cNvSpPr>
-            <a:spLocks xmlns:a="http://schemas.openxmlformats.org/drawingml/2006/main" noGrp="1"/>
-          </p:cNvSpPr>
-          <p:nvPr/>
-        </p:nvSpPr>
-        <p:spPr>
-          <a:xfrm xmlns:a="http://schemas.openxmlformats.org/drawingml/2006/main">
-            <a:off x="1000125" y="3019425"/>
-            <a:ext cx="476250" cy="419100"/>
+                <a16:creationId xmlns:a16="http://schemas.microsoft.com/office/drawing/2014/main" id="{5B0EEFFA-9345-40BA-98A1-4323A33DAC5C}"/>
+              </a:ext>
+            </a:extLst>
+          </p:cNvPr>
+          <p:cNvSpPr>
+            <a:spLocks xmlns:a="http://schemas.openxmlformats.org/drawingml/2006/main" noGrp="1"/>
+          </p:cNvSpPr>
+          <p:nvPr/>
+        </p:nvSpPr>
+        <p:spPr>
+          <a:xfrm xmlns:a="http://schemas.openxmlformats.org/drawingml/2006/main">
+            <a:off x="1162050" y="2905125"/>
+            <a:ext cx="400050" cy="400050"/>
           </a:xfrm>
           <a:prstGeom xmlns:a="http://schemas.openxmlformats.org/drawingml/2006/main" prst="rect">
             <a:avLst/>
@@ -8470,9 +8474,9 @@
           <a:lstStyle xmlns:a="http://schemas.openxmlformats.org/drawingml/2006/main"/>
           <a:p xmlns:a="http://schemas.openxmlformats.org/drawingml/2006/main">
             <a:pPr algn="ctr">
-              <a:defRPr sz="1350" b="1">
-                <a:solidFill>
-                  <a:srgbClr val="FFFFFF"/>
+              <a:defRPr sz="1125" b="1">
+                <a:solidFill>
+                  <a:srgbClr val="2C6E73"/>
                 </a:solidFill>
                 <a:latin typeface="Arial"/>
                 <a:ea typeface="Arial"/>
@@ -8480,9 +8484,9 @@
               </a:defRPr>
             </a:pPr>
             <a:r>
-              <a:rPr sz="1350" b="1">
-                <a:solidFill>
-                  <a:srgbClr val="FFFFFF"/>
+              <a:rPr sz="1125" b="1">
+                <a:solidFill>
+                  <a:srgbClr val="2C6E73"/>
                 </a:solidFill>
                 <a:latin typeface="Arial"/>
                 <a:ea typeface="Arial"/>
@@ -8498,19 +8502,19 @@
           <p:cNvPr id="16" name="">
             <a:extLst xmlns:a="http://schemas.openxmlformats.org/drawingml/2006/main">
               <a:ext uri="{FF2B5EF4-FFF2-40B4-BE49-F238E27FC236}">
-                <a16:creationId xmlns:a16="http://schemas.microsoft.com/office/drawing/2014/main" id="{7662D676-9FC7-456C-AFC1-4834AFD77616}"/>
-              </a:ext>
-            </a:extLst>
-          </p:cNvPr>
-          <p:cNvSpPr>
-            <a:spLocks xmlns:a="http://schemas.openxmlformats.org/drawingml/2006/main" noGrp="1"/>
-          </p:cNvSpPr>
-          <p:nvPr/>
-        </p:nvSpPr>
-        <p:spPr>
-          <a:xfrm xmlns:a="http://schemas.openxmlformats.org/drawingml/2006/main">
-            <a:off x="1714500" y="2924175"/>
-            <a:ext cx="9429750" cy="609600"/>
+                <a16:creationId xmlns:a16="http://schemas.microsoft.com/office/drawing/2014/main" id="{66EA88C2-8627-44F2-ABE6-C88D3BE3A2DF}"/>
+              </a:ext>
+            </a:extLst>
+          </p:cNvPr>
+          <p:cNvSpPr>
+            <a:spLocks xmlns:a="http://schemas.openxmlformats.org/drawingml/2006/main" noGrp="1"/>
+          </p:cNvSpPr>
+          <p:nvPr/>
+        </p:nvSpPr>
+        <p:spPr>
+          <a:xfrm xmlns:a="http://schemas.openxmlformats.org/drawingml/2006/main">
+            <a:off x="1714500" y="2819400"/>
+            <a:ext cx="9525000" cy="638175"/>
           </a:xfrm>
           <a:prstGeom xmlns:a="http://schemas.openxmlformats.org/drawingml/2006/main" prst="rect">
             <a:avLst/>
@@ -8527,7 +8531,7 @@
           <a:lstStyle xmlns:a="http://schemas.openxmlformats.org/drawingml/2006/main"/>
           <a:p xmlns:a="http://schemas.openxmlformats.org/drawingml/2006/main">
             <a:pPr algn="l">
-              <a:defRPr sz="1500" b="0">
+              <a:defRPr sz="1575" b="0">
                 <a:solidFill>
                   <a:srgbClr val="17253A"/>
                 </a:solidFill>
@@ -8537,7 +8541,7 @@
               </a:defRPr>
             </a:pPr>
             <a:r>
-              <a:rPr sz="1500" b="0">
+              <a:rPr sz="1575" b="0">
                 <a:solidFill>
                   <a:srgbClr val="17253A"/>
                 </a:solidFill>
@@ -8545,7 +8549,7 @@
                 <a:ea typeface="Arial"/>
                 <a:cs typeface="Arial"/>
               </a:rPr>
-              <a:t>Set up the method: Work through operations of equal priority from left to right.</a:t>
+              <a:t>7 × 23 = 161</a:t>
             </a:r>
           </a:p>
         </p:txBody>
@@ -8555,28 +8559,30 @@
           <p:cNvPr id="17" name="">
             <a:extLst xmlns:a="http://schemas.openxmlformats.org/drawingml/2006/main">
               <a:ext uri="{FF2B5EF4-FFF2-40B4-BE49-F238E27FC236}">
-                <a16:creationId xmlns:a16="http://schemas.microsoft.com/office/drawing/2014/main" id="{D1F496F7-B0D4-4AF5-8EAB-621A13582D88}"/>
-              </a:ext>
-            </a:extLst>
-          </p:cNvPr>
-          <p:cNvSpPr>
-            <a:spLocks xmlns:a="http://schemas.openxmlformats.org/drawingml/2006/main" noGrp="1"/>
-          </p:cNvSpPr>
-          <p:nvPr/>
-        </p:nvSpPr>
-        <p:spPr>
-          <a:xfrm xmlns:a="http://schemas.openxmlformats.org/drawingml/2006/main">
-            <a:off x="1000125" y="3733800"/>
-            <a:ext cx="476250" cy="476250"/>
-          </a:xfrm>
-          <a:prstGeom xmlns:a="http://schemas.openxmlformats.org/drawingml/2006/main" prst="ellipse">
+                <a16:creationId xmlns:a16="http://schemas.microsoft.com/office/drawing/2014/main" id="{FB96708C-B8B8-449B-8DC1-9B521039B1CB}"/>
+              </a:ext>
+            </a:extLst>
+          </p:cNvPr>
+          <p:cNvSpPr>
+            <a:spLocks xmlns:a="http://schemas.openxmlformats.org/drawingml/2006/main" noGrp="1"/>
+          </p:cNvSpPr>
+          <p:nvPr/>
+        </p:nvSpPr>
+        <p:spPr>
+          <a:xfrm xmlns:a="http://schemas.openxmlformats.org/drawingml/2006/main">
+            <a:off x="1714500" y="3476625"/>
+            <a:ext cx="9334500" cy="9525"/>
+          </a:xfrm>
+          <a:prstGeom xmlns:a="http://schemas.openxmlformats.org/drawingml/2006/main" prst="rect">
             <a:avLst/>
           </a:prstGeom>
           <a:solidFill xmlns:a="http://schemas.openxmlformats.org/drawingml/2006/main">
-            <a:srgbClr val="2C6E73"/>
+            <a:srgbClr val="D9E0E6"/>
           </a:solidFill>
           <a:ln xmlns:a="http://schemas.openxmlformats.org/drawingml/2006/main" w="0">
-            <a:noFill/>
+            <a:solidFill>
+              <a:srgbClr val="D9E0E6"/>
+            </a:solidFill>
           </a:ln>
         </p:spPr>
       </p:sp>
@@ -8585,19 +8591,19 @@
           <p:cNvPr id="18" name="">
             <a:extLst xmlns:a="http://schemas.openxmlformats.org/drawingml/2006/main">
               <a:ext uri="{FF2B5EF4-FFF2-40B4-BE49-F238E27FC236}">
-                <a16:creationId xmlns:a16="http://schemas.microsoft.com/office/drawing/2014/main" id="{88B8B23D-71B9-4C3C-8DC0-603120198BDF}"/>
-              </a:ext>
-            </a:extLst>
-          </p:cNvPr>
-          <p:cNvSpPr>
-            <a:spLocks xmlns:a="http://schemas.openxmlformats.org/drawingml/2006/main" noGrp="1"/>
-          </p:cNvSpPr>
-          <p:nvPr/>
-        </p:nvSpPr>
-        <p:spPr>
-          <a:xfrm xmlns:a="http://schemas.openxmlformats.org/drawingml/2006/main">
-            <a:off x="1000125" y="3762375"/>
-            <a:ext cx="476250" cy="419100"/>
+                <a16:creationId xmlns:a16="http://schemas.microsoft.com/office/drawing/2014/main" id="{FC7DB9C3-339B-4CED-917A-190FA2E7AEAD}"/>
+              </a:ext>
+            </a:extLst>
+          </p:cNvPr>
+          <p:cNvSpPr>
+            <a:spLocks xmlns:a="http://schemas.openxmlformats.org/drawingml/2006/main" noGrp="1"/>
+          </p:cNvSpPr>
+          <p:nvPr/>
+        </p:nvSpPr>
+        <p:spPr>
+          <a:xfrm xmlns:a="http://schemas.openxmlformats.org/drawingml/2006/main">
+            <a:off x="1162050" y="3609975"/>
+            <a:ext cx="400050" cy="400050"/>
           </a:xfrm>
           <a:prstGeom xmlns:a="http://schemas.openxmlformats.org/drawingml/2006/main" prst="rect">
             <a:avLst/>
@@ -8614,9 +8620,9 @@
           <a:lstStyle xmlns:a="http://schemas.openxmlformats.org/drawingml/2006/main"/>
           <a:p xmlns:a="http://schemas.openxmlformats.org/drawingml/2006/main">
             <a:pPr algn="ctr">
-              <a:defRPr sz="1350" b="1">
-                <a:solidFill>
-                  <a:srgbClr val="FFFFFF"/>
+              <a:defRPr sz="1125" b="1">
+                <a:solidFill>
+                  <a:srgbClr val="2C6E73"/>
                 </a:solidFill>
                 <a:latin typeface="Arial"/>
                 <a:ea typeface="Arial"/>
@@ -8624,9 +8630,9 @@
               </a:defRPr>
             </a:pPr>
             <a:r>
-              <a:rPr sz="1350" b="1">
-                <a:solidFill>
-                  <a:srgbClr val="FFFFFF"/>
+              <a:rPr sz="1125" b="1">
+                <a:solidFill>
+                  <a:srgbClr val="2C6E73"/>
                 </a:solidFill>
                 <a:latin typeface="Arial"/>
                 <a:ea typeface="Arial"/>
@@ -8642,19 +8648,19 @@
           <p:cNvPr id="19" name="">
             <a:extLst xmlns:a="http://schemas.openxmlformats.org/drawingml/2006/main">
               <a:ext uri="{FF2B5EF4-FFF2-40B4-BE49-F238E27FC236}">
-                <a16:creationId xmlns:a16="http://schemas.microsoft.com/office/drawing/2014/main" id="{19FCAFAA-5878-4136-9D94-36CABBD828C1}"/>
-              </a:ext>
-            </a:extLst>
-          </p:cNvPr>
-          <p:cNvSpPr>
-            <a:spLocks xmlns:a="http://schemas.openxmlformats.org/drawingml/2006/main" noGrp="1"/>
-          </p:cNvSpPr>
-          <p:nvPr/>
-        </p:nvSpPr>
-        <p:spPr>
-          <a:xfrm xmlns:a="http://schemas.openxmlformats.org/drawingml/2006/main">
-            <a:off x="1714500" y="3667125"/>
-            <a:ext cx="9429750" cy="609600"/>
+                <a16:creationId xmlns:a16="http://schemas.microsoft.com/office/drawing/2014/main" id="{5D8CAA8D-32F3-4E6D-96EC-651624C36309}"/>
+              </a:ext>
+            </a:extLst>
+          </p:cNvPr>
+          <p:cNvSpPr>
+            <a:spLocks xmlns:a="http://schemas.openxmlformats.org/drawingml/2006/main" noGrp="1"/>
+          </p:cNvSpPr>
+          <p:nvPr/>
+        </p:nvSpPr>
+        <p:spPr>
+          <a:xfrm xmlns:a="http://schemas.openxmlformats.org/drawingml/2006/main">
+            <a:off x="1714500" y="3524250"/>
+            <a:ext cx="9525000" cy="638175"/>
           </a:xfrm>
           <a:prstGeom xmlns:a="http://schemas.openxmlformats.org/drawingml/2006/main" prst="rect">
             <a:avLst/>
@@ -8671,7 +8677,7 @@
           <a:lstStyle xmlns:a="http://schemas.openxmlformats.org/drawingml/2006/main"/>
           <a:p xmlns:a="http://schemas.openxmlformats.org/drawingml/2006/main">
             <a:pPr algn="l">
-              <a:defRPr sz="1500" b="0">
+              <a:defRPr sz="1575" b="0">
                 <a:solidFill>
                   <a:srgbClr val="17253A"/>
                 </a:solidFill>
@@ -8681,7 +8687,7 @@
               </a:defRPr>
             </a:pPr>
             <a:r>
-              <a:rPr sz="1500" b="0">
+              <a:rPr sz="1575" b="0">
                 <a:solidFill>
                   <a:srgbClr val="17253A"/>
                 </a:solidFill>
@@ -8689,7 +8695,7 @@
                 <a:ea typeface="Arial"/>
                 <a:cs typeface="Arial"/>
               </a:rPr>
-              <a:t>Complete the calculation: Yes, both equal 161.</a:t>
+              <a:t>7 × 20 + 7 × 3 = 140 + 21</a:t>
             </a:r>
           </a:p>
         </p:txBody>
@@ -8699,28 +8705,30 @@
           <p:cNvPr id="20" name="">
             <a:extLst xmlns:a="http://schemas.openxmlformats.org/drawingml/2006/main">
               <a:ext uri="{FF2B5EF4-FFF2-40B4-BE49-F238E27FC236}">
-                <a16:creationId xmlns:a16="http://schemas.microsoft.com/office/drawing/2014/main" id="{456A4BAE-3B40-47B1-84A6-455B3DAC6954}"/>
-              </a:ext>
-            </a:extLst>
-          </p:cNvPr>
-          <p:cNvSpPr>
-            <a:spLocks xmlns:a="http://schemas.openxmlformats.org/drawingml/2006/main" noGrp="1"/>
-          </p:cNvSpPr>
-          <p:nvPr/>
-        </p:nvSpPr>
-        <p:spPr>
-          <a:xfrm xmlns:a="http://schemas.openxmlformats.org/drawingml/2006/main">
-            <a:off x="1000125" y="4476750"/>
-            <a:ext cx="476250" cy="476250"/>
-          </a:xfrm>
-          <a:prstGeom xmlns:a="http://schemas.openxmlformats.org/drawingml/2006/main" prst="ellipse">
+                <a16:creationId xmlns:a16="http://schemas.microsoft.com/office/drawing/2014/main" id="{92BB7BC6-4514-48D2-B57B-E6011CF501FF}"/>
+              </a:ext>
+            </a:extLst>
+          </p:cNvPr>
+          <p:cNvSpPr>
+            <a:spLocks xmlns:a="http://schemas.openxmlformats.org/drawingml/2006/main" noGrp="1"/>
+          </p:cNvSpPr>
+          <p:nvPr/>
+        </p:nvSpPr>
+        <p:spPr>
+          <a:xfrm xmlns:a="http://schemas.openxmlformats.org/drawingml/2006/main">
+            <a:off x="1714500" y="4181475"/>
+            <a:ext cx="9334500" cy="9525"/>
+          </a:xfrm>
+          <a:prstGeom xmlns:a="http://schemas.openxmlformats.org/drawingml/2006/main" prst="rect">
             <a:avLst/>
           </a:prstGeom>
           <a:solidFill xmlns:a="http://schemas.openxmlformats.org/drawingml/2006/main">
-            <a:srgbClr val="2C6E73"/>
+            <a:srgbClr val="D9E0E6"/>
           </a:solidFill>
           <a:ln xmlns:a="http://schemas.openxmlformats.org/drawingml/2006/main" w="0">
-            <a:noFill/>
+            <a:solidFill>
+              <a:srgbClr val="D9E0E6"/>
+            </a:solidFill>
           </a:ln>
         </p:spPr>
       </p:sp>
@@ -8729,19 +8737,19 @@
           <p:cNvPr id="21" name="">
             <a:extLst xmlns:a="http://schemas.openxmlformats.org/drawingml/2006/main">
               <a:ext uri="{FF2B5EF4-FFF2-40B4-BE49-F238E27FC236}">
-                <a16:creationId xmlns:a16="http://schemas.microsoft.com/office/drawing/2014/main" id="{8179EF73-AD40-4CDD-9EC3-1488B6E8DC2E}"/>
-              </a:ext>
-            </a:extLst>
-          </p:cNvPr>
-          <p:cNvSpPr>
-            <a:spLocks xmlns:a="http://schemas.openxmlformats.org/drawingml/2006/main" noGrp="1"/>
-          </p:cNvSpPr>
-          <p:nvPr/>
-        </p:nvSpPr>
-        <p:spPr>
-          <a:xfrm xmlns:a="http://schemas.openxmlformats.org/drawingml/2006/main">
-            <a:off x="1000125" y="4505325"/>
-            <a:ext cx="476250" cy="419100"/>
+                <a16:creationId xmlns:a16="http://schemas.microsoft.com/office/drawing/2014/main" id="{850024AB-3ECE-4634-B57F-D2359631001B}"/>
+              </a:ext>
+            </a:extLst>
+          </p:cNvPr>
+          <p:cNvSpPr>
+            <a:spLocks xmlns:a="http://schemas.openxmlformats.org/drawingml/2006/main" noGrp="1"/>
+          </p:cNvSpPr>
+          <p:nvPr/>
+        </p:nvSpPr>
+        <p:spPr>
+          <a:xfrm xmlns:a="http://schemas.openxmlformats.org/drawingml/2006/main">
+            <a:off x="1162050" y="4314825"/>
+            <a:ext cx="400050" cy="400050"/>
           </a:xfrm>
           <a:prstGeom xmlns:a="http://schemas.openxmlformats.org/drawingml/2006/main" prst="rect">
             <a:avLst/>
@@ -8758,9 +8766,9 @@
           <a:lstStyle xmlns:a="http://schemas.openxmlformats.org/drawingml/2006/main"/>
           <a:p xmlns:a="http://schemas.openxmlformats.org/drawingml/2006/main">
             <a:pPr algn="ctr">
-              <a:defRPr sz="1350" b="1">
-                <a:solidFill>
-                  <a:srgbClr val="FFFFFF"/>
+              <a:defRPr sz="1125" b="1">
+                <a:solidFill>
+                  <a:srgbClr val="2C6E73"/>
                 </a:solidFill>
                 <a:latin typeface="Arial"/>
                 <a:ea typeface="Arial"/>
@@ -8768,9 +8776,9 @@
               </a:defRPr>
             </a:pPr>
             <a:r>
-              <a:rPr sz="1350" b="1">
-                <a:solidFill>
-                  <a:srgbClr val="FFFFFF"/>
+              <a:rPr sz="1125" b="1">
+                <a:solidFill>
+                  <a:srgbClr val="2C6E73"/>
                 </a:solidFill>
                 <a:latin typeface="Arial"/>
                 <a:ea typeface="Arial"/>
@@ -8786,19 +8794,19 @@
           <p:cNvPr id="22" name="">
             <a:extLst xmlns:a="http://schemas.openxmlformats.org/drawingml/2006/main">
               <a:ext uri="{FF2B5EF4-FFF2-40B4-BE49-F238E27FC236}">
-                <a16:creationId xmlns:a16="http://schemas.microsoft.com/office/drawing/2014/main" id="{96C0BFFB-A150-4FB0-A67D-BC522466343D}"/>
-              </a:ext>
-            </a:extLst>
-          </p:cNvPr>
-          <p:cNvSpPr>
-            <a:spLocks xmlns:a="http://schemas.openxmlformats.org/drawingml/2006/main" noGrp="1"/>
-          </p:cNvSpPr>
-          <p:nvPr/>
-        </p:nvSpPr>
-        <p:spPr>
-          <a:xfrm xmlns:a="http://schemas.openxmlformats.org/drawingml/2006/main">
-            <a:off x="1714500" y="4410075"/>
-            <a:ext cx="9429750" cy="609600"/>
+                <a16:creationId xmlns:a16="http://schemas.microsoft.com/office/drawing/2014/main" id="{C961D261-F2EB-4C62-91FC-A86E2CCC7CE6}"/>
+              </a:ext>
+            </a:extLst>
+          </p:cNvPr>
+          <p:cNvSpPr>
+            <a:spLocks xmlns:a="http://schemas.openxmlformats.org/drawingml/2006/main" noGrp="1"/>
+          </p:cNvSpPr>
+          <p:nvPr/>
+        </p:nvSpPr>
+        <p:spPr>
+          <a:xfrm xmlns:a="http://schemas.openxmlformats.org/drawingml/2006/main">
+            <a:off x="1714500" y="4229100"/>
+            <a:ext cx="9525000" cy="638175"/>
           </a:xfrm>
           <a:prstGeom xmlns:a="http://schemas.openxmlformats.org/drawingml/2006/main" prst="rect">
             <a:avLst/>
@@ -8815,9 +8823,9 @@
           <a:lstStyle xmlns:a="http://schemas.openxmlformats.org/drawingml/2006/main"/>
           <a:p xmlns:a="http://schemas.openxmlformats.org/drawingml/2006/main">
             <a:pPr algn="l">
-              <a:defRPr sz="1500" b="1">
-                <a:solidFill>
-                  <a:srgbClr val="2F785D"/>
+              <a:defRPr sz="1575" b="0">
+                <a:solidFill>
+                  <a:srgbClr val="17253A"/>
                 </a:solidFill>
                 <a:latin typeface="Arial"/>
                 <a:ea typeface="Arial"/>
@@ -8825,15 +8833,161 @@
               </a:defRPr>
             </a:pPr>
             <a:r>
-              <a:rPr sz="1500" b="1">
+              <a:rPr sz="1575" b="0">
+                <a:solidFill>
+                  <a:srgbClr val="17253A"/>
+                </a:solidFill>
+                <a:latin typeface="Arial"/>
+                <a:ea typeface="Arial"/>
+                <a:cs typeface="Arial"/>
+              </a:rPr>
+              <a:t>140 + 21 = 161</a:t>
+            </a:r>
+          </a:p>
+        </p:txBody>
+      </p:sp>
+      <p:sp>
+        <p:nvSpPr>
+          <p:cNvPr id="23" name="">
+            <a:extLst xmlns:a="http://schemas.openxmlformats.org/drawingml/2006/main">
+              <a:ext uri="{FF2B5EF4-FFF2-40B4-BE49-F238E27FC236}">
+                <a16:creationId xmlns:a16="http://schemas.microsoft.com/office/drawing/2014/main" id="{68505904-A79A-412B-ABD1-EDDB0B0B99D7}"/>
+              </a:ext>
+            </a:extLst>
+          </p:cNvPr>
+          <p:cNvSpPr>
+            <a:spLocks xmlns:a="http://schemas.openxmlformats.org/drawingml/2006/main" noGrp="1"/>
+          </p:cNvSpPr>
+          <p:nvPr/>
+        </p:nvSpPr>
+        <p:spPr>
+          <a:xfrm xmlns:a="http://schemas.openxmlformats.org/drawingml/2006/main">
+            <a:off x="1714500" y="4886325"/>
+            <a:ext cx="9334500" cy="9525"/>
+          </a:xfrm>
+          <a:prstGeom xmlns:a="http://schemas.openxmlformats.org/drawingml/2006/main" prst="rect">
+            <a:avLst/>
+          </a:prstGeom>
+          <a:solidFill xmlns:a="http://schemas.openxmlformats.org/drawingml/2006/main">
+            <a:srgbClr val="D9E0E6"/>
+          </a:solidFill>
+          <a:ln xmlns:a="http://schemas.openxmlformats.org/drawingml/2006/main" w="0">
+            <a:solidFill>
+              <a:srgbClr val="D9E0E6"/>
+            </a:solidFill>
+          </a:ln>
+        </p:spPr>
+      </p:sp>
+      <p:sp>
+        <p:nvSpPr>
+          <p:cNvPr id="24" name="">
+            <a:extLst xmlns:a="http://schemas.openxmlformats.org/drawingml/2006/main">
+              <a:ext uri="{FF2B5EF4-FFF2-40B4-BE49-F238E27FC236}">
+                <a16:creationId xmlns:a16="http://schemas.microsoft.com/office/drawing/2014/main" id="{5BDB626A-BCB6-4304-B48F-269FF13A5746}"/>
+              </a:ext>
+            </a:extLst>
+          </p:cNvPr>
+          <p:cNvSpPr>
+            <a:spLocks xmlns:a="http://schemas.openxmlformats.org/drawingml/2006/main" noGrp="1"/>
+          </p:cNvSpPr>
+          <p:nvPr/>
+        </p:nvSpPr>
+        <p:spPr>
+          <a:xfrm xmlns:a="http://schemas.openxmlformats.org/drawingml/2006/main">
+            <a:off x="1162050" y="5019675"/>
+            <a:ext cx="400050" cy="400050"/>
+          </a:xfrm>
+          <a:prstGeom xmlns:a="http://schemas.openxmlformats.org/drawingml/2006/main" prst="rect">
+            <a:avLst/>
+          </a:prstGeom>
+          <a:noFill xmlns:a="http://schemas.openxmlformats.org/drawingml/2006/main"/>
+          <a:ln xmlns:a="http://schemas.openxmlformats.org/drawingml/2006/main" w="0">
+            <a:noFill/>
+          </a:ln>
+        </p:spPr>
+        <p:txBody>
+          <a:bodyPr xmlns:a="http://schemas.openxmlformats.org/drawingml/2006/main" anchor="ctr">
+            <a:normAutofit fontScale="100000"/>
+          </a:bodyPr>
+          <a:lstStyle xmlns:a="http://schemas.openxmlformats.org/drawingml/2006/main"/>
+          <a:p xmlns:a="http://schemas.openxmlformats.org/drawingml/2006/main">
+            <a:pPr algn="ctr">
+              <a:defRPr sz="1125" b="1">
                 <a:solidFill>
                   <a:srgbClr val="2F785D"/>
                 </a:solidFill>
                 <a:latin typeface="Arial"/>
                 <a:ea typeface="Arial"/>
                 <a:cs typeface="Arial"/>
+              </a:defRPr>
+            </a:pPr>
+            <a:r>
+              <a:rPr sz="1125" b="1">
+                <a:solidFill>
+                  <a:srgbClr val="2F785D"/>
+                </a:solidFill>
+                <a:latin typeface="Arial"/>
+                <a:ea typeface="Arial"/>
+                <a:cs typeface="Arial"/>
               </a:rPr>
-              <a:t>Check the result: Check by estimating or comparing with an equivalent expression.</a:t>
+              <a:t>5</a:t>
+            </a:r>
+          </a:p>
+        </p:txBody>
+      </p:sp>
+      <p:sp>
+        <p:nvSpPr>
+          <p:cNvPr id="25" name="">
+            <a:extLst xmlns:a="http://schemas.openxmlformats.org/drawingml/2006/main">
+              <a:ext uri="{FF2B5EF4-FFF2-40B4-BE49-F238E27FC236}">
+                <a16:creationId xmlns:a16="http://schemas.microsoft.com/office/drawing/2014/main" id="{8B402146-8E7F-4B29-8245-4F4E56A11B4B}"/>
+              </a:ext>
+            </a:extLst>
+          </p:cNvPr>
+          <p:cNvSpPr>
+            <a:spLocks xmlns:a="http://schemas.openxmlformats.org/drawingml/2006/main" noGrp="1"/>
+          </p:cNvSpPr>
+          <p:nvPr/>
+        </p:nvSpPr>
+        <p:spPr>
+          <a:xfrm xmlns:a="http://schemas.openxmlformats.org/drawingml/2006/main">
+            <a:off x="1714500" y="4933950"/>
+            <a:ext cx="9525000" cy="638175"/>
+          </a:xfrm>
+          <a:prstGeom xmlns:a="http://schemas.openxmlformats.org/drawingml/2006/main" prst="rect">
+            <a:avLst/>
+          </a:prstGeom>
+          <a:noFill xmlns:a="http://schemas.openxmlformats.org/drawingml/2006/main"/>
+          <a:ln xmlns:a="http://schemas.openxmlformats.org/drawingml/2006/main" w="0">
+            <a:noFill/>
+          </a:ln>
+        </p:spPr>
+        <p:txBody>
+          <a:bodyPr xmlns:a="http://schemas.openxmlformats.org/drawingml/2006/main" anchor="ctr">
+            <a:normAutofit fontScale="100000"/>
+          </a:bodyPr>
+          <a:lstStyle xmlns:a="http://schemas.openxmlformats.org/drawingml/2006/main"/>
+          <a:p xmlns:a="http://schemas.openxmlformats.org/drawingml/2006/main">
+            <a:pPr algn="l">
+              <a:defRPr sz="1575" b="1">
+                <a:solidFill>
+                  <a:srgbClr val="2F785D"/>
+                </a:solidFill>
+                <a:latin typeface="Arial"/>
+                <a:ea typeface="Arial"/>
+                <a:cs typeface="Arial"/>
+              </a:defRPr>
+            </a:pPr>
+            <a:r>
+              <a:rPr sz="1575" b="1">
+                <a:solidFill>
+                  <a:srgbClr val="2F785D"/>
+                </a:solidFill>
+                <a:latin typeface="Arial"/>
+                <a:ea typeface="Arial"/>
+                <a:cs typeface="Arial"/>
+              </a:rPr>
+              <a:t>Both expressions equal 161</a:t>
             </a:r>
           </a:p>
         </p:txBody>
@@ -8841,7 +8995,7 @@
     </p:spTree>
     <p:extLst>
       <p:ext uri="{BB962C8B-B14F-4D97-AF65-F5344CB8AC3E}">
-        <p14:creationId xmlns:p14="http://schemas.microsoft.com/office/powerpoint/2010/main" val="957647122"/>
+        <p14:creationId xmlns:p14="http://schemas.microsoft.com/office/powerpoint/2010/main" val="1795529136"/>
       </p:ext>
     </p:extLst>
   </p:cSld>
@@ -9078,6 +9232,51 @@
                       </p:childTnLst>
                     </p:cTn>
                   </p:par>
+                  <p:par>
+                    <p:cTn id="23" fill="hold">
+                      <p:stCondLst>
+                        <p:cond delay="indefinite"/>
+                      </p:stCondLst>
+                      <p:childTnLst>
+                        <p:par>
+                          <p:cTn id="24" fill="hold">
+                            <p:stCondLst>
+                              <p:cond delay="0"/>
+                            </p:stCondLst>
+                            <p:childTnLst>
+                              <p:par>
+                                <p:cTn id="25" presetID="1" presetClass="entr" presetSubtype="0" fill="hold" grpId="0" nodeType="clickEffect">
+                                  <p:stCondLst>
+                                    <p:cond delay="0"/>
+                                  </p:stCondLst>
+                                  <p:childTnLst>
+                                    <p:set>
+                                      <p:cBhvr>
+                                        <p:cTn id="26" dur="1" fill="hold">
+                                          <p:stCondLst>
+                                            <p:cond delay="0"/>
+                                          </p:stCondLst>
+                                        </p:cTn>
+                                        <p:tgtEl>
+                                          <p:spTgt spid="25"/>
+                                        </p:tgtEl>
+                                        <p:attrNameLst>
+                                          <p:attrName>style.visibility</p:attrName>
+                                        </p:attrNameLst>
+                                      </p:cBhvr>
+                                      <p:to>
+                                        <p:strVal val="visible"/>
+                                      </p:to>
+                                    </p:set>
+                                  </p:childTnLst>
+                                </p:cTn>
+                              </p:par>
+                            </p:childTnLst>
+                          </p:cTn>
+                        </p:par>
+                      </p:childTnLst>
+                    </p:cTn>
+                  </p:par>
                 </p:childTnLst>
               </p:cTn>
               <p:prevCondLst>
@@ -9105,6 +9304,7 @@
       <p:bldP spid="16" grpId="0"/>
       <p:bldP spid="19" grpId="0"/>
       <p:bldP spid="22" grpId="0"/>
+      <p:bldP spid="25" grpId="0"/>
     </p:bldLst>
   </p:timing>
 </p:sld>
@@ -9134,7 +9334,7 @@
           <p:cNvPr id="15" name="">
             <a:extLst xmlns:a="http://schemas.openxmlformats.org/drawingml/2006/main">
               <a:ext uri="{FF2B5EF4-FFF2-40B4-BE49-F238E27FC236}">
-                <a16:creationId xmlns:a16="http://schemas.microsoft.com/office/drawing/2014/main" id="{73171049-DCCD-4F82-9D57-76CC08ED9579}"/>
+                <a16:creationId xmlns:a16="http://schemas.microsoft.com/office/drawing/2014/main" id="{6A7848A4-1F11-4F56-9530-4CB36A015C95}"/>
               </a:ext>
             </a:extLst>
           </p:cNvPr>
@@ -9166,7 +9366,7 @@
           <p:cNvPr id="2" name="">
             <a:extLst xmlns:a="http://schemas.openxmlformats.org/drawingml/2006/main">
               <a:ext uri="{FF2B5EF4-FFF2-40B4-BE49-F238E27FC236}">
-                <a16:creationId xmlns:a16="http://schemas.microsoft.com/office/drawing/2014/main" id="{C9A62973-AF10-4639-8583-976BFCB4571B}"/>
+                <a16:creationId xmlns:a16="http://schemas.microsoft.com/office/drawing/2014/main" id="{8470364F-582F-4F94-970C-C7D67396DE25}"/>
               </a:ext>
             </a:extLst>
           </p:cNvPr>
@@ -9223,7 +9423,7 @@
           <p:cNvPr id="3" name="">
             <a:extLst xmlns:a="http://schemas.openxmlformats.org/drawingml/2006/main">
               <a:ext uri="{FF2B5EF4-FFF2-40B4-BE49-F238E27FC236}">
-                <a16:creationId xmlns:a16="http://schemas.microsoft.com/office/drawing/2014/main" id="{49155C97-7C99-49B7-AFDF-9FCF1C75FE2F}"/>
+                <a16:creationId xmlns:a16="http://schemas.microsoft.com/office/drawing/2014/main" id="{E43E5E50-9DE9-4A4C-8A03-661E14CD25EB}"/>
               </a:ext>
             </a:extLst>
           </p:cNvPr>
@@ -9255,7 +9455,7 @@
           <p:cNvPr id="4" name="">
             <a:extLst xmlns:a="http://schemas.openxmlformats.org/drawingml/2006/main">
               <a:ext uri="{FF2B5EF4-FFF2-40B4-BE49-F238E27FC236}">
-                <a16:creationId xmlns:a16="http://schemas.microsoft.com/office/drawing/2014/main" id="{007C966B-8596-4D57-9245-ACFD2F224715}"/>
+                <a16:creationId xmlns:a16="http://schemas.microsoft.com/office/drawing/2014/main" id="{BC996AA2-BBAA-4BAA-9B05-73F90717509B}"/>
               </a:ext>
             </a:extLst>
           </p:cNvPr>
@@ -9312,7 +9512,7 @@
           <p:cNvPr id="5" name="">
             <a:extLst xmlns:a="http://schemas.openxmlformats.org/drawingml/2006/main">
               <a:ext uri="{FF2B5EF4-FFF2-40B4-BE49-F238E27FC236}">
-                <a16:creationId xmlns:a16="http://schemas.microsoft.com/office/drawing/2014/main" id="{A3362EEE-411B-4076-94FF-F6DF2E1D037F}"/>
+                <a16:creationId xmlns:a16="http://schemas.microsoft.com/office/drawing/2014/main" id="{E8996630-7055-46DA-BE1A-07A25210B8D6}"/>
               </a:ext>
             </a:extLst>
           </p:cNvPr>
@@ -9369,7 +9569,7 @@
           <p:cNvPr id="6" name="">
             <a:extLst xmlns:a="http://schemas.openxmlformats.org/drawingml/2006/main">
               <a:ext uri="{FF2B5EF4-FFF2-40B4-BE49-F238E27FC236}">
-                <a16:creationId xmlns:a16="http://schemas.microsoft.com/office/drawing/2014/main" id="{EBC3CE4C-ADEA-4F3A-8742-E6376674D859}"/>
+                <a16:creationId xmlns:a16="http://schemas.microsoft.com/office/drawing/2014/main" id="{409D9194-96A2-4FBE-92EB-C907D6FB7743}"/>
               </a:ext>
             </a:extLst>
           </p:cNvPr>
@@ -9426,7 +9626,7 @@
           <p:cNvPr id="7" name="">
             <a:extLst xmlns:a="http://schemas.openxmlformats.org/drawingml/2006/main">
               <a:ext uri="{FF2B5EF4-FFF2-40B4-BE49-F238E27FC236}">
-                <a16:creationId xmlns:a16="http://schemas.microsoft.com/office/drawing/2014/main" id="{603C502C-3C08-40DB-BEA9-AAAD96592B2D}"/>
+                <a16:creationId xmlns:a16="http://schemas.microsoft.com/office/drawing/2014/main" id="{076A454C-9352-4CB8-A08B-AF1D0D8F8446}"/>
               </a:ext>
             </a:extLst>
           </p:cNvPr>
@@ -9458,7 +9658,7 @@
           <p:cNvPr id="8" name="">
             <a:extLst xmlns:a="http://schemas.openxmlformats.org/drawingml/2006/main">
               <a:ext uri="{FF2B5EF4-FFF2-40B4-BE49-F238E27FC236}">
-                <a16:creationId xmlns:a16="http://schemas.microsoft.com/office/drawing/2014/main" id="{282EB9F3-C1F5-42A9-9F62-4960C6D3E678}"/>
+                <a16:creationId xmlns:a16="http://schemas.microsoft.com/office/drawing/2014/main" id="{BAFC7282-D318-4DAD-ABC2-C50C1FD469D8}"/>
               </a:ext>
             </a:extLst>
           </p:cNvPr>
@@ -9515,7 +9715,7 @@
           <p:cNvPr id="9" name="">
             <a:extLst xmlns:a="http://schemas.openxmlformats.org/drawingml/2006/main">
               <a:ext uri="{FF2B5EF4-FFF2-40B4-BE49-F238E27FC236}">
-                <a16:creationId xmlns:a16="http://schemas.microsoft.com/office/drawing/2014/main" id="{FF0BFF85-7DA8-4428-BF9C-7FF86B9613B1}"/>
+                <a16:creationId xmlns:a16="http://schemas.microsoft.com/office/drawing/2014/main" id="{ABFC3252-5903-43C7-9DD6-C46FE1336B3E}"/>
               </a:ext>
             </a:extLst>
           </p:cNvPr>
@@ -9572,7 +9772,7 @@
           <p:cNvPr id="10" name="">
             <a:extLst xmlns:a="http://schemas.openxmlformats.org/drawingml/2006/main">
               <a:ext uri="{FF2B5EF4-FFF2-40B4-BE49-F238E27FC236}">
-                <a16:creationId xmlns:a16="http://schemas.microsoft.com/office/drawing/2014/main" id="{D14FD3C8-46D7-43C7-8292-6E27ABF701B3}"/>
+                <a16:creationId xmlns:a16="http://schemas.microsoft.com/office/drawing/2014/main" id="{D0A509F6-8B4C-4806-AC00-55A727C42225}"/>
               </a:ext>
             </a:extLst>
           </p:cNvPr>
@@ -9629,7 +9829,7 @@
           <p:cNvPr id="11" name="">
             <a:extLst xmlns:a="http://schemas.openxmlformats.org/drawingml/2006/main">
               <a:ext uri="{FF2B5EF4-FFF2-40B4-BE49-F238E27FC236}">
-                <a16:creationId xmlns:a16="http://schemas.microsoft.com/office/drawing/2014/main" id="{FBADD782-217B-4D45-A924-1CFA3E742418}"/>
+                <a16:creationId xmlns:a16="http://schemas.microsoft.com/office/drawing/2014/main" id="{557EA30F-CD6C-4371-9C3C-93F48873CFA5}"/>
               </a:ext>
             </a:extLst>
           </p:cNvPr>
@@ -9686,7 +9886,7 @@
           <p:cNvPr id="12" name="">
             <a:extLst xmlns:a="http://schemas.openxmlformats.org/drawingml/2006/main">
               <a:ext uri="{FF2B5EF4-FFF2-40B4-BE49-F238E27FC236}">
-                <a16:creationId xmlns:a16="http://schemas.microsoft.com/office/drawing/2014/main" id="{0485DF78-AB77-430A-BCE7-F61A73137A7F}"/>
+                <a16:creationId xmlns:a16="http://schemas.microsoft.com/office/drawing/2014/main" id="{444F96A2-8A38-4681-B0CA-1DF1D37F2BCE}"/>
               </a:ext>
             </a:extLst>
           </p:cNvPr>
@@ -9718,7 +9918,7 @@
           <p:cNvPr id="13" name="">
             <a:extLst xmlns:a="http://schemas.openxmlformats.org/drawingml/2006/main">
               <a:ext uri="{FF2B5EF4-FFF2-40B4-BE49-F238E27FC236}">
-                <a16:creationId xmlns:a16="http://schemas.microsoft.com/office/drawing/2014/main" id="{41F9E3CA-33AA-4EF8-BEBC-552D35C95A87}"/>
+                <a16:creationId xmlns:a16="http://schemas.microsoft.com/office/drawing/2014/main" id="{666C9A9A-FB27-41EB-A97E-3661DE6D30EA}"/>
               </a:ext>
             </a:extLst>
           </p:cNvPr>
@@ -9775,7 +9975,7 @@
           <p:cNvPr id="14" name="">
             <a:extLst xmlns:a="http://schemas.openxmlformats.org/drawingml/2006/main">
               <a:ext uri="{FF2B5EF4-FFF2-40B4-BE49-F238E27FC236}">
-                <a16:creationId xmlns:a16="http://schemas.microsoft.com/office/drawing/2014/main" id="{34C713EF-405A-44FA-8FBF-047CAF54E67B}"/>
+                <a16:creationId xmlns:a16="http://schemas.microsoft.com/office/drawing/2014/main" id="{C66E2DE7-643A-4417-AF31-6CA6B4B83960}"/>
               </a:ext>
             </a:extLst>
           </p:cNvPr>
@@ -9830,7 +10030,7 @@
     </p:spTree>
     <p:extLst>
       <p:ext uri="{BB962C8B-B14F-4D97-AF65-F5344CB8AC3E}">
-        <p14:creationId xmlns:p14="http://schemas.microsoft.com/office/powerpoint/2010/main" val="16164724"/>
+        <p14:creationId xmlns:p14="http://schemas.microsoft.com/office/powerpoint/2010/main" val="1910516991"/>
       </p:ext>
     </p:extLst>
   </p:cSld>
@@ -10031,7 +10231,7 @@
           <p:cNvPr id="16" name="">
             <a:extLst xmlns:a="http://schemas.openxmlformats.org/drawingml/2006/main">
               <a:ext uri="{FF2B5EF4-FFF2-40B4-BE49-F238E27FC236}">
-                <a16:creationId xmlns:a16="http://schemas.microsoft.com/office/drawing/2014/main" id="{F5D41DD9-73A0-458A-A4D1-EC35B1736B35}"/>
+                <a16:creationId xmlns:a16="http://schemas.microsoft.com/office/drawing/2014/main" id="{F99252B5-69DD-4920-ADE0-9DA7909B7CC2}"/>
               </a:ext>
             </a:extLst>
           </p:cNvPr>
@@ -10063,7 +10263,7 @@
           <p:cNvPr id="2" name="">
             <a:extLst xmlns:a="http://schemas.openxmlformats.org/drawingml/2006/main">
               <a:ext uri="{FF2B5EF4-FFF2-40B4-BE49-F238E27FC236}">
-                <a16:creationId xmlns:a16="http://schemas.microsoft.com/office/drawing/2014/main" id="{E4B5A56C-8F11-4F77-86D4-41F52011D1BC}"/>
+                <a16:creationId xmlns:a16="http://schemas.microsoft.com/office/drawing/2014/main" id="{9E16F2CE-9602-4370-A541-776B4C3462BA}"/>
               </a:ext>
             </a:extLst>
           </p:cNvPr>
@@ -10120,7 +10320,7 @@
           <p:cNvPr id="3" name="">
             <a:extLst xmlns:a="http://schemas.openxmlformats.org/drawingml/2006/main">
               <a:ext uri="{FF2B5EF4-FFF2-40B4-BE49-F238E27FC236}">
-                <a16:creationId xmlns:a16="http://schemas.microsoft.com/office/drawing/2014/main" id="{81E8ACDB-CBD8-4794-8A54-568A2709FD62}"/>
+                <a16:creationId xmlns:a16="http://schemas.microsoft.com/office/drawing/2014/main" id="{D96E7285-48EA-478B-971B-063E044DB557}"/>
               </a:ext>
             </a:extLst>
           </p:cNvPr>
@@ -10152,7 +10352,7 @@
           <p:cNvPr id="4" name="">
             <a:extLst xmlns:a="http://schemas.openxmlformats.org/drawingml/2006/main">
               <a:ext uri="{FF2B5EF4-FFF2-40B4-BE49-F238E27FC236}">
-                <a16:creationId xmlns:a16="http://schemas.microsoft.com/office/drawing/2014/main" id="{9821D534-3890-4424-B007-238A01C69DE0}"/>
+                <a16:creationId xmlns:a16="http://schemas.microsoft.com/office/drawing/2014/main" id="{89603979-6E72-4982-B066-BA0541360BEE}"/>
               </a:ext>
             </a:extLst>
           </p:cNvPr>
@@ -10209,7 +10409,7 @@
           <p:cNvPr id="5" name="">
             <a:extLst xmlns:a="http://schemas.openxmlformats.org/drawingml/2006/main">
               <a:ext uri="{FF2B5EF4-FFF2-40B4-BE49-F238E27FC236}">
-                <a16:creationId xmlns:a16="http://schemas.microsoft.com/office/drawing/2014/main" id="{5BF3DCA2-5F13-4F7F-AE4B-314DE73DA473}"/>
+                <a16:creationId xmlns:a16="http://schemas.microsoft.com/office/drawing/2014/main" id="{58DF00EE-D20D-46CF-B167-CDE26056A531}"/>
               </a:ext>
             </a:extLst>
           </p:cNvPr>
@@ -10266,7 +10466,7 @@
           <p:cNvPr id="6" name="">
             <a:extLst xmlns:a="http://schemas.openxmlformats.org/drawingml/2006/main">
               <a:ext uri="{FF2B5EF4-FFF2-40B4-BE49-F238E27FC236}">
-                <a16:creationId xmlns:a16="http://schemas.microsoft.com/office/drawing/2014/main" id="{AA5F49B8-9978-4866-94DB-9F28204D16F0}"/>
+                <a16:creationId xmlns:a16="http://schemas.microsoft.com/office/drawing/2014/main" id="{EC023317-29CB-4C14-81BD-3A73893D55B4}"/>
               </a:ext>
             </a:extLst>
           </p:cNvPr>
@@ -10323,7 +10523,7 @@
           <p:cNvPr id="7" name="">
             <a:extLst xmlns:a="http://schemas.openxmlformats.org/drawingml/2006/main">
               <a:ext uri="{FF2B5EF4-FFF2-40B4-BE49-F238E27FC236}">
-                <a16:creationId xmlns:a16="http://schemas.microsoft.com/office/drawing/2014/main" id="{CE867EE6-DC55-4B6C-A526-88A2CE41966C}"/>
+                <a16:creationId xmlns:a16="http://schemas.microsoft.com/office/drawing/2014/main" id="{E457398C-23ED-49C7-99D6-AE8392CD1B4F}"/>
               </a:ext>
             </a:extLst>
           </p:cNvPr>
@@ -10355,7 +10555,7 @@
           <p:cNvPr id="8" name="">
             <a:extLst xmlns:a="http://schemas.openxmlformats.org/drawingml/2006/main">
               <a:ext uri="{FF2B5EF4-FFF2-40B4-BE49-F238E27FC236}">
-                <a16:creationId xmlns:a16="http://schemas.microsoft.com/office/drawing/2014/main" id="{FDEC8230-8C3D-4027-98A8-0FE2BCF5428F}"/>
+                <a16:creationId xmlns:a16="http://schemas.microsoft.com/office/drawing/2014/main" id="{D557521D-6A82-46AE-B187-529C815204C1}"/>
               </a:ext>
             </a:extLst>
           </p:cNvPr>
@@ -10412,7 +10612,7 @@
           <p:cNvPr id="9" name="">
             <a:extLst xmlns:a="http://schemas.openxmlformats.org/drawingml/2006/main">
               <a:ext uri="{FF2B5EF4-FFF2-40B4-BE49-F238E27FC236}">
-                <a16:creationId xmlns:a16="http://schemas.microsoft.com/office/drawing/2014/main" id="{BBFCF26E-4F9C-4F53-BFC2-29D64A418AB5}"/>
+                <a16:creationId xmlns:a16="http://schemas.microsoft.com/office/drawing/2014/main" id="{EA1D454D-AE51-484C-9AA6-894F796418F6}"/>
               </a:ext>
             </a:extLst>
           </p:cNvPr>
@@ -10469,7 +10669,7 @@
           <p:cNvPr id="10" name="">
             <a:extLst xmlns:a="http://schemas.openxmlformats.org/drawingml/2006/main">
               <a:ext uri="{FF2B5EF4-FFF2-40B4-BE49-F238E27FC236}">
-                <a16:creationId xmlns:a16="http://schemas.microsoft.com/office/drawing/2014/main" id="{66DC0A82-2344-4BA6-9E12-250C35F9C355}"/>
+                <a16:creationId xmlns:a16="http://schemas.microsoft.com/office/drawing/2014/main" id="{C96026FE-926A-47D0-A661-EE873B789AA4}"/>
               </a:ext>
             </a:extLst>
           </p:cNvPr>
@@ -10526,7 +10726,7 @@
           <p:cNvPr id="11" name="">
             <a:extLst xmlns:a="http://schemas.openxmlformats.org/drawingml/2006/main">
               <a:ext uri="{FF2B5EF4-FFF2-40B4-BE49-F238E27FC236}">
-                <a16:creationId xmlns:a16="http://schemas.microsoft.com/office/drawing/2014/main" id="{0ED16A9E-AE43-41F6-B5FE-9BAD3E440A94}"/>
+                <a16:creationId xmlns:a16="http://schemas.microsoft.com/office/drawing/2014/main" id="{6FBC9366-067D-4E3D-AEAA-2CB141970815}"/>
               </a:ext>
             </a:extLst>
           </p:cNvPr>
@@ -10583,7 +10783,7 @@
           <p:cNvPr id="12" name="">
             <a:extLst xmlns:a="http://schemas.openxmlformats.org/drawingml/2006/main">
               <a:ext uri="{FF2B5EF4-FFF2-40B4-BE49-F238E27FC236}">
-                <a16:creationId xmlns:a16="http://schemas.microsoft.com/office/drawing/2014/main" id="{B0C98430-3557-4839-8A5E-7257F17EB066}"/>
+                <a16:creationId xmlns:a16="http://schemas.microsoft.com/office/drawing/2014/main" id="{9EDB7643-8717-4952-A8B3-0B5D3BF0CD26}"/>
               </a:ext>
             </a:extLst>
           </p:cNvPr>
@@ -10640,7 +10840,7 @@
           <p:cNvPr id="13" name="">
             <a:extLst xmlns:a="http://schemas.openxmlformats.org/drawingml/2006/main">
               <a:ext uri="{FF2B5EF4-FFF2-40B4-BE49-F238E27FC236}">
-                <a16:creationId xmlns:a16="http://schemas.microsoft.com/office/drawing/2014/main" id="{C196BF08-F635-4B6A-A5C9-499DC329C837}"/>
+                <a16:creationId xmlns:a16="http://schemas.microsoft.com/office/drawing/2014/main" id="{175800FB-0869-42C2-9D63-2801CD160A90}"/>
               </a:ext>
             </a:extLst>
           </p:cNvPr>
@@ -10697,7 +10897,7 @@
           <p:cNvPr id="14" name="">
             <a:extLst xmlns:a="http://schemas.openxmlformats.org/drawingml/2006/main">
               <a:ext uri="{FF2B5EF4-FFF2-40B4-BE49-F238E27FC236}">
-                <a16:creationId xmlns:a16="http://schemas.microsoft.com/office/drawing/2014/main" id="{C99369E4-D35C-44B1-9DF6-49B7EF9B19DF}"/>
+                <a16:creationId xmlns:a16="http://schemas.microsoft.com/office/drawing/2014/main" id="{CB61EABA-D221-40A3-B56A-8990A58CF073}"/>
               </a:ext>
             </a:extLst>
           </p:cNvPr>
@@ -10754,7 +10954,7 @@
           <p:cNvPr id="15" name="">
             <a:extLst xmlns:a="http://schemas.openxmlformats.org/drawingml/2006/main">
               <a:ext uri="{FF2B5EF4-FFF2-40B4-BE49-F238E27FC236}">
-                <a16:creationId xmlns:a16="http://schemas.microsoft.com/office/drawing/2014/main" id="{220DF8C7-705D-4324-A672-51AA24E77DFE}"/>
+                <a16:creationId xmlns:a16="http://schemas.microsoft.com/office/drawing/2014/main" id="{7C90C452-5FCA-4FB7-8380-715E1B736425}"/>
               </a:ext>
             </a:extLst>
           </p:cNvPr>
@@ -10809,7 +11009,7 @@
     </p:spTree>
     <p:extLst>
       <p:ext uri="{BB962C8B-B14F-4D97-AF65-F5344CB8AC3E}">
-        <p14:creationId xmlns:p14="http://schemas.microsoft.com/office/powerpoint/2010/main" val="1788630950"/>
+        <p14:creationId xmlns:p14="http://schemas.microsoft.com/office/powerpoint/2010/main" val="193423394"/>
       </p:ext>
     </p:extLst>
   </p:cSld>
@@ -10964,7 +11164,7 @@
           <p:cNvPr id="16" name="">
             <a:extLst xmlns:a="http://schemas.openxmlformats.org/drawingml/2006/main">
               <a:ext uri="{FF2B5EF4-FFF2-40B4-BE49-F238E27FC236}">
-                <a16:creationId xmlns:a16="http://schemas.microsoft.com/office/drawing/2014/main" id="{A96289B4-AFE6-4ED2-A844-4DA97E05283D}"/>
+                <a16:creationId xmlns:a16="http://schemas.microsoft.com/office/drawing/2014/main" id="{96542BCE-B9AA-4794-9C68-FAFE0EBB3376}"/>
               </a:ext>
             </a:extLst>
           </p:cNvPr>
@@ -10996,7 +11196,7 @@
           <p:cNvPr id="2" name="">
             <a:extLst xmlns:a="http://schemas.openxmlformats.org/drawingml/2006/main">
               <a:ext uri="{FF2B5EF4-FFF2-40B4-BE49-F238E27FC236}">
-                <a16:creationId xmlns:a16="http://schemas.microsoft.com/office/drawing/2014/main" id="{DC683639-5C9B-43FA-9296-F4D390DD716E}"/>
+                <a16:creationId xmlns:a16="http://schemas.microsoft.com/office/drawing/2014/main" id="{641CB0BD-1846-4111-825F-286222252E00}"/>
               </a:ext>
             </a:extLst>
           </p:cNvPr>
@@ -11053,7 +11253,7 @@
           <p:cNvPr id="3" name="">
             <a:extLst xmlns:a="http://schemas.openxmlformats.org/drawingml/2006/main">
               <a:ext uri="{FF2B5EF4-FFF2-40B4-BE49-F238E27FC236}">
-                <a16:creationId xmlns:a16="http://schemas.microsoft.com/office/drawing/2014/main" id="{3156A30A-48A7-4269-AEF9-6E43E0E89730}"/>
+                <a16:creationId xmlns:a16="http://schemas.microsoft.com/office/drawing/2014/main" id="{C47A2E4D-E5D4-4BCE-973C-2013AAB33797}"/>
               </a:ext>
             </a:extLst>
           </p:cNvPr>
@@ -11085,7 +11285,7 @@
           <p:cNvPr id="4" name="">
             <a:extLst xmlns:a="http://schemas.openxmlformats.org/drawingml/2006/main">
               <a:ext uri="{FF2B5EF4-FFF2-40B4-BE49-F238E27FC236}">
-                <a16:creationId xmlns:a16="http://schemas.microsoft.com/office/drawing/2014/main" id="{A12C19CF-4383-4D3A-BCE0-ADB7A292EEFC}"/>
+                <a16:creationId xmlns:a16="http://schemas.microsoft.com/office/drawing/2014/main" id="{2B6B575C-C80E-416D-82DD-77ED3A5AB303}"/>
               </a:ext>
             </a:extLst>
           </p:cNvPr>
@@ -11142,7 +11342,7 @@
           <p:cNvPr id="5" name="">
             <a:extLst xmlns:a="http://schemas.openxmlformats.org/drawingml/2006/main">
               <a:ext uri="{FF2B5EF4-FFF2-40B4-BE49-F238E27FC236}">
-                <a16:creationId xmlns:a16="http://schemas.microsoft.com/office/drawing/2014/main" id="{10C4D500-A8FF-47E8-81CC-74453BC4289E}"/>
+                <a16:creationId xmlns:a16="http://schemas.microsoft.com/office/drawing/2014/main" id="{6EFFA2C6-FC43-4196-9C03-68BF72E7934C}"/>
               </a:ext>
             </a:extLst>
           </p:cNvPr>
@@ -11199,7 +11399,7 @@
           <p:cNvPr id="6" name="">
             <a:extLst xmlns:a="http://schemas.openxmlformats.org/drawingml/2006/main">
               <a:ext uri="{FF2B5EF4-FFF2-40B4-BE49-F238E27FC236}">
-                <a16:creationId xmlns:a16="http://schemas.microsoft.com/office/drawing/2014/main" id="{70F2C562-FB8A-4837-83CE-909BFBDCA716}"/>
+                <a16:creationId xmlns:a16="http://schemas.microsoft.com/office/drawing/2014/main" id="{98B1D590-2BF5-496E-8491-85276A86F24B}"/>
               </a:ext>
             </a:extLst>
           </p:cNvPr>
@@ -11256,7 +11456,7 @@
           <p:cNvPr id="7" name="">
             <a:extLst xmlns:a="http://schemas.openxmlformats.org/drawingml/2006/main">
               <a:ext uri="{FF2B5EF4-FFF2-40B4-BE49-F238E27FC236}">
-                <a16:creationId xmlns:a16="http://schemas.microsoft.com/office/drawing/2014/main" id="{1162DF34-E3DB-464F-AFE1-37B84D45F64E}"/>
+                <a16:creationId xmlns:a16="http://schemas.microsoft.com/office/drawing/2014/main" id="{43862639-A954-4222-B9C4-AA71CC5FC63C}"/>
               </a:ext>
             </a:extLst>
           </p:cNvPr>
@@ -11288,7 +11488,7 @@
           <p:cNvPr id="8" name="">
             <a:extLst xmlns:a="http://schemas.openxmlformats.org/drawingml/2006/main">
               <a:ext uri="{FF2B5EF4-FFF2-40B4-BE49-F238E27FC236}">
-                <a16:creationId xmlns:a16="http://schemas.microsoft.com/office/drawing/2014/main" id="{908A012C-EB7A-4464-B3F5-95E9489D708F}"/>
+                <a16:creationId xmlns:a16="http://schemas.microsoft.com/office/drawing/2014/main" id="{6CBE1C15-4F7A-4E8D-A960-80D821D5982C}"/>
               </a:ext>
             </a:extLst>
           </p:cNvPr>
@@ -11345,7 +11545,7 @@
           <p:cNvPr id="9" name="">
             <a:extLst xmlns:a="http://schemas.openxmlformats.org/drawingml/2006/main">
               <a:ext uri="{FF2B5EF4-FFF2-40B4-BE49-F238E27FC236}">
-                <a16:creationId xmlns:a16="http://schemas.microsoft.com/office/drawing/2014/main" id="{0935574A-AC03-417F-8DD9-771D97F1557F}"/>
+                <a16:creationId xmlns:a16="http://schemas.microsoft.com/office/drawing/2014/main" id="{9DB85AC9-5840-438F-9DFE-8C02953FA936}"/>
               </a:ext>
             </a:extLst>
           </p:cNvPr>
@@ -11406,7 +11606,7 @@
           <p:nvPr/>
         </p:nvPicPr>
         <p:blipFill>
-          <a:blip xmlns:r="http://schemas.openxmlformats.org/officeDocument/2006/relationships" xmlns:a="http://schemas.openxmlformats.org/drawingml/2006/main" r:embed="Rabbcc74802c745bd"/>
+          <a:blip xmlns:r="http://schemas.openxmlformats.org/officeDocument/2006/relationships" xmlns:a="http://schemas.openxmlformats.org/drawingml/2006/main" r:embed="Rc7afa0c29f83447a"/>
           <a:stretch xmlns:a="http://schemas.openxmlformats.org/drawingml/2006/main"/>
         </p:blipFill>
         <p:spPr>
@@ -11424,7 +11624,7 @@
           <p:cNvPr id="11" name="">
             <a:extLst xmlns:a="http://schemas.openxmlformats.org/drawingml/2006/main">
               <a:ext uri="{FF2B5EF4-FFF2-40B4-BE49-F238E27FC236}">
-                <a16:creationId xmlns:a16="http://schemas.microsoft.com/office/drawing/2014/main" id="{27625CF6-7535-407C-9A36-DD2E2DAF9917}"/>
+                <a16:creationId xmlns:a16="http://schemas.microsoft.com/office/drawing/2014/main" id="{96FFAB49-5E3F-4B69-B04C-B79281892AB7}"/>
               </a:ext>
             </a:extLst>
           </p:cNvPr>
@@ -11481,7 +11681,7 @@
           <p:cNvPr id="12" name="">
             <a:extLst xmlns:a="http://schemas.openxmlformats.org/drawingml/2006/main">
               <a:ext uri="{FF2B5EF4-FFF2-40B4-BE49-F238E27FC236}">
-                <a16:creationId xmlns:a16="http://schemas.microsoft.com/office/drawing/2014/main" id="{DDF01902-2D1D-43F3-93A5-52AF4B7FABD9}"/>
+                <a16:creationId xmlns:a16="http://schemas.microsoft.com/office/drawing/2014/main" id="{DE27A434-4578-458B-BAF0-620D7AFBE6F3}"/>
               </a:ext>
             </a:extLst>
           </p:cNvPr>
@@ -11538,7 +11738,7 @@
           <p:cNvPr id="13" name="">
             <a:extLst xmlns:a="http://schemas.openxmlformats.org/drawingml/2006/main">
               <a:ext uri="{FF2B5EF4-FFF2-40B4-BE49-F238E27FC236}">
-                <a16:creationId xmlns:a16="http://schemas.microsoft.com/office/drawing/2014/main" id="{77B2E6D5-0CE2-40F8-B9E9-B08F70CEACFF}"/>
+                <a16:creationId xmlns:a16="http://schemas.microsoft.com/office/drawing/2014/main" id="{DD7531D6-6AA6-4831-B7B8-FC546DE44E65}"/>
               </a:ext>
             </a:extLst>
           </p:cNvPr>
@@ -11570,7 +11770,7 @@
           <p:cNvPr id="14" name="">
             <a:extLst xmlns:a="http://schemas.openxmlformats.org/drawingml/2006/main">
               <a:ext uri="{FF2B5EF4-FFF2-40B4-BE49-F238E27FC236}">
-                <a16:creationId xmlns:a16="http://schemas.microsoft.com/office/drawing/2014/main" id="{433D8781-DE82-489E-9E89-B2722F6DB308}"/>
+                <a16:creationId xmlns:a16="http://schemas.microsoft.com/office/drawing/2014/main" id="{FCE15010-8744-473E-A407-68B4D4C5434D}"/>
               </a:ext>
             </a:extLst>
           </p:cNvPr>
@@ -11627,7 +11827,7 @@
           <p:cNvPr id="15" name="">
             <a:extLst xmlns:a="http://schemas.openxmlformats.org/drawingml/2006/main">
               <a:ext uri="{FF2B5EF4-FFF2-40B4-BE49-F238E27FC236}">
-                <a16:creationId xmlns:a16="http://schemas.microsoft.com/office/drawing/2014/main" id="{D4B69597-7D14-4B5C-B268-98C154347F75}"/>
+                <a16:creationId xmlns:a16="http://schemas.microsoft.com/office/drawing/2014/main" id="{6BE4167B-8AD9-483A-BD74-219E2C62F2DF}"/>
               </a:ext>
             </a:extLst>
           </p:cNvPr>
@@ -11682,7 +11882,7 @@
     </p:spTree>
     <p:extLst>
       <p:ext uri="{BB962C8B-B14F-4D97-AF65-F5344CB8AC3E}">
-        <p14:creationId xmlns:p14="http://schemas.microsoft.com/office/powerpoint/2010/main" val="1097903445"/>
+        <p14:creationId xmlns:p14="http://schemas.microsoft.com/office/powerpoint/2010/main" val="1050995337"/>
       </p:ext>
     </p:extLst>
   </p:cSld>
@@ -11837,7 +12037,7 @@
           <p:cNvPr id="23" name="">
             <a:extLst xmlns:a="http://schemas.openxmlformats.org/drawingml/2006/main">
               <a:ext uri="{FF2B5EF4-FFF2-40B4-BE49-F238E27FC236}">
-                <a16:creationId xmlns:a16="http://schemas.microsoft.com/office/drawing/2014/main" id="{8A3CA084-B659-4881-B7B6-47DB15DD7C58}"/>
+                <a16:creationId xmlns:a16="http://schemas.microsoft.com/office/drawing/2014/main" id="{E0552202-62CF-4525-8317-E9880D88E275}"/>
               </a:ext>
             </a:extLst>
           </p:cNvPr>
@@ -11869,7 +12069,7 @@
           <p:cNvPr id="2" name="">
             <a:extLst xmlns:a="http://schemas.openxmlformats.org/drawingml/2006/main">
               <a:ext uri="{FF2B5EF4-FFF2-40B4-BE49-F238E27FC236}">
-                <a16:creationId xmlns:a16="http://schemas.microsoft.com/office/drawing/2014/main" id="{4CE02502-15CD-421B-856E-8B1E6E145A86}"/>
+                <a16:creationId xmlns:a16="http://schemas.microsoft.com/office/drawing/2014/main" id="{8780A79F-B633-4218-9679-3E61693B4F80}"/>
               </a:ext>
             </a:extLst>
           </p:cNvPr>
@@ -11926,7 +12126,7 @@
           <p:cNvPr id="3" name="">
             <a:extLst xmlns:a="http://schemas.openxmlformats.org/drawingml/2006/main">
               <a:ext uri="{FF2B5EF4-FFF2-40B4-BE49-F238E27FC236}">
-                <a16:creationId xmlns:a16="http://schemas.microsoft.com/office/drawing/2014/main" id="{14B1820D-2165-413C-B4CF-7791EA22A764}"/>
+                <a16:creationId xmlns:a16="http://schemas.microsoft.com/office/drawing/2014/main" id="{8EE2FC75-C119-468B-94B7-7789C5721A80}"/>
               </a:ext>
             </a:extLst>
           </p:cNvPr>
@@ -11958,7 +12158,7 @@
           <p:cNvPr id="4" name="">
             <a:extLst xmlns:a="http://schemas.openxmlformats.org/drawingml/2006/main">
               <a:ext uri="{FF2B5EF4-FFF2-40B4-BE49-F238E27FC236}">
-                <a16:creationId xmlns:a16="http://schemas.microsoft.com/office/drawing/2014/main" id="{7F166D05-4E46-48CC-AC03-3829BC725184}"/>
+                <a16:creationId xmlns:a16="http://schemas.microsoft.com/office/drawing/2014/main" id="{0954E3FE-EE43-4C93-A23F-E36414D6BB13}"/>
               </a:ext>
             </a:extLst>
           </p:cNvPr>
@@ -12015,7 +12215,7 @@
           <p:cNvPr id="5" name="">
             <a:extLst xmlns:a="http://schemas.openxmlformats.org/drawingml/2006/main">
               <a:ext uri="{FF2B5EF4-FFF2-40B4-BE49-F238E27FC236}">
-                <a16:creationId xmlns:a16="http://schemas.microsoft.com/office/drawing/2014/main" id="{D2E3126D-5A0A-487E-9D4D-1B579A10DF12}"/>
+                <a16:creationId xmlns:a16="http://schemas.microsoft.com/office/drawing/2014/main" id="{C4737C2A-52F9-4836-BED5-3FD75BB5D149}"/>
               </a:ext>
             </a:extLst>
           </p:cNvPr>
@@ -12072,7 +12272,7 @@
           <p:cNvPr id="6" name="">
             <a:extLst xmlns:a="http://schemas.openxmlformats.org/drawingml/2006/main">
               <a:ext uri="{FF2B5EF4-FFF2-40B4-BE49-F238E27FC236}">
-                <a16:creationId xmlns:a16="http://schemas.microsoft.com/office/drawing/2014/main" id="{EE014895-F793-452D-982C-D5A523830F72}"/>
+                <a16:creationId xmlns:a16="http://schemas.microsoft.com/office/drawing/2014/main" id="{2ECBA7C5-45E2-402A-BC04-22B6390D3E16}"/>
               </a:ext>
             </a:extLst>
           </p:cNvPr>
@@ -12129,7 +12329,7 @@
           <p:cNvPr id="7" name="">
             <a:extLst xmlns:a="http://schemas.openxmlformats.org/drawingml/2006/main">
               <a:ext uri="{FF2B5EF4-FFF2-40B4-BE49-F238E27FC236}">
-                <a16:creationId xmlns:a16="http://schemas.microsoft.com/office/drawing/2014/main" id="{AF7953E8-D3C1-4C79-822F-94BA5D91037A}"/>
+                <a16:creationId xmlns:a16="http://schemas.microsoft.com/office/drawing/2014/main" id="{AE9A4ED6-7D94-4B91-AD08-2C467748C0B1}"/>
               </a:ext>
             </a:extLst>
           </p:cNvPr>
@@ -12161,7 +12361,7 @@
           <p:cNvPr id="8" name="">
             <a:extLst xmlns:a="http://schemas.openxmlformats.org/drawingml/2006/main">
               <a:ext uri="{FF2B5EF4-FFF2-40B4-BE49-F238E27FC236}">
-                <a16:creationId xmlns:a16="http://schemas.microsoft.com/office/drawing/2014/main" id="{157B7E19-A0FD-48C3-A757-CFD0A5007041}"/>
+                <a16:creationId xmlns:a16="http://schemas.microsoft.com/office/drawing/2014/main" id="{CDA1B4AD-7E27-4B06-ADE8-51EE1BE28C64}"/>
               </a:ext>
             </a:extLst>
           </p:cNvPr>
@@ -12218,7 +12418,7 @@
           <p:cNvPr id="9" name="">
             <a:extLst xmlns:a="http://schemas.openxmlformats.org/drawingml/2006/main">
               <a:ext uri="{FF2B5EF4-FFF2-40B4-BE49-F238E27FC236}">
-                <a16:creationId xmlns:a16="http://schemas.microsoft.com/office/drawing/2014/main" id="{7C9A1D04-D4CC-4A8F-A214-D2BD9C7AF6F7}"/>
+                <a16:creationId xmlns:a16="http://schemas.microsoft.com/office/drawing/2014/main" id="{977E7A72-AAE0-41AF-A54D-C7210356685C}"/>
               </a:ext>
             </a:extLst>
           </p:cNvPr>
@@ -12275,7 +12475,7 @@
           <p:cNvPr id="10" name="">
             <a:extLst xmlns:a="http://schemas.openxmlformats.org/drawingml/2006/main">
               <a:ext uri="{FF2B5EF4-FFF2-40B4-BE49-F238E27FC236}">
-                <a16:creationId xmlns:a16="http://schemas.microsoft.com/office/drawing/2014/main" id="{DA394B71-25AE-4D62-8BD2-F228D6EB9CA1}"/>
+                <a16:creationId xmlns:a16="http://schemas.microsoft.com/office/drawing/2014/main" id="{34B2E0D1-B48C-4FCF-A4C6-7394D888A222}"/>
               </a:ext>
             </a:extLst>
           </p:cNvPr>
@@ -12309,7 +12509,7 @@
           <p:cNvPr id="11" name="">
             <a:extLst xmlns:a="http://schemas.openxmlformats.org/drawingml/2006/main">
               <a:ext uri="{FF2B5EF4-FFF2-40B4-BE49-F238E27FC236}">
-                <a16:creationId xmlns:a16="http://schemas.microsoft.com/office/drawing/2014/main" id="{91895502-532F-47C9-9F39-D5A926DC6C6F}"/>
+                <a16:creationId xmlns:a16="http://schemas.microsoft.com/office/drawing/2014/main" id="{566E8E9A-D6E3-4C8B-A94D-236BAB80F5D3}"/>
               </a:ext>
             </a:extLst>
           </p:cNvPr>
@@ -12341,7 +12541,7 @@
           <p:cNvPr id="12" name="">
             <a:extLst xmlns:a="http://schemas.openxmlformats.org/drawingml/2006/main">
               <a:ext uri="{FF2B5EF4-FFF2-40B4-BE49-F238E27FC236}">
-                <a16:creationId xmlns:a16="http://schemas.microsoft.com/office/drawing/2014/main" id="{1E7757D1-9AD0-4069-8257-67F8897E918D}"/>
+                <a16:creationId xmlns:a16="http://schemas.microsoft.com/office/drawing/2014/main" id="{9FD606B1-DBD0-4BFA-B478-93D5B0CF57CC}"/>
               </a:ext>
             </a:extLst>
           </p:cNvPr>
@@ -12398,7 +12598,7 @@
           <p:cNvPr id="13" name="">
             <a:extLst xmlns:a="http://schemas.openxmlformats.org/drawingml/2006/main">
               <a:ext uri="{FF2B5EF4-FFF2-40B4-BE49-F238E27FC236}">
-                <a16:creationId xmlns:a16="http://schemas.microsoft.com/office/drawing/2014/main" id="{F8C6D86F-16AE-4CDC-8ADE-C1E4BA29CA86}"/>
+                <a16:creationId xmlns:a16="http://schemas.microsoft.com/office/drawing/2014/main" id="{6FF8AB20-FA66-4983-BE0E-3FF05DB20FA4}"/>
               </a:ext>
             </a:extLst>
           </p:cNvPr>
@@ -12455,7 +12655,7 @@
           <p:cNvPr id="14" name="">
             <a:extLst xmlns:a="http://schemas.openxmlformats.org/drawingml/2006/main">
               <a:ext uri="{FF2B5EF4-FFF2-40B4-BE49-F238E27FC236}">
-                <a16:creationId xmlns:a16="http://schemas.microsoft.com/office/drawing/2014/main" id="{104144B2-C32D-4CF5-9BF8-F31B3224A7DC}"/>
+                <a16:creationId xmlns:a16="http://schemas.microsoft.com/office/drawing/2014/main" id="{6C533F9D-7F04-4506-B530-507F1E0B2B20}"/>
               </a:ext>
             </a:extLst>
           </p:cNvPr>
@@ -12489,7 +12689,7 @@
           <p:cNvPr id="15" name="">
             <a:extLst xmlns:a="http://schemas.openxmlformats.org/drawingml/2006/main">
               <a:ext uri="{FF2B5EF4-FFF2-40B4-BE49-F238E27FC236}">
-                <a16:creationId xmlns:a16="http://schemas.microsoft.com/office/drawing/2014/main" id="{A68FD48F-844F-4BDD-911E-9B1683CA7C8F}"/>
+                <a16:creationId xmlns:a16="http://schemas.microsoft.com/office/drawing/2014/main" id="{76C513C3-FF7C-4146-9F92-A305F0163AA9}"/>
               </a:ext>
             </a:extLst>
           </p:cNvPr>
@@ -12521,7 +12721,7 @@
           <p:cNvPr id="16" name="">
             <a:extLst xmlns:a="http://schemas.openxmlformats.org/drawingml/2006/main">
               <a:ext uri="{FF2B5EF4-FFF2-40B4-BE49-F238E27FC236}">
-                <a16:creationId xmlns:a16="http://schemas.microsoft.com/office/drawing/2014/main" id="{50EF4BE2-0E32-4AF2-9C8D-7B87067F2A4F}"/>
+                <a16:creationId xmlns:a16="http://schemas.microsoft.com/office/drawing/2014/main" id="{6A17ADE5-AADA-4DBE-9929-53AA96BF5410}"/>
               </a:ext>
             </a:extLst>
           </p:cNvPr>
@@ -12578,7 +12778,7 @@
           <p:cNvPr id="17" name="">
             <a:extLst xmlns:a="http://schemas.openxmlformats.org/drawingml/2006/main">
               <a:ext uri="{FF2B5EF4-FFF2-40B4-BE49-F238E27FC236}">
-                <a16:creationId xmlns:a16="http://schemas.microsoft.com/office/drawing/2014/main" id="{537CE5CA-F86E-4ABF-97DA-802B7CA31728}"/>
+                <a16:creationId xmlns:a16="http://schemas.microsoft.com/office/drawing/2014/main" id="{8F49085F-5D91-44E9-B385-46CD6C9E9FAD}"/>
               </a:ext>
             </a:extLst>
           </p:cNvPr>
@@ -12635,7 +12835,7 @@
           <p:cNvPr id="18" name="">
             <a:extLst xmlns:a="http://schemas.openxmlformats.org/drawingml/2006/main">
               <a:ext uri="{FF2B5EF4-FFF2-40B4-BE49-F238E27FC236}">
-                <a16:creationId xmlns:a16="http://schemas.microsoft.com/office/drawing/2014/main" id="{C09EFB25-5F9B-4ED8-BD69-2A04547D583C}"/>
+                <a16:creationId xmlns:a16="http://schemas.microsoft.com/office/drawing/2014/main" id="{67B93CF6-106B-4BB2-A487-6D045A54743D}"/>
               </a:ext>
             </a:extLst>
           </p:cNvPr>
@@ -12669,7 +12869,7 @@
           <p:cNvPr id="19" name="">
             <a:extLst xmlns:a="http://schemas.openxmlformats.org/drawingml/2006/main">
               <a:ext uri="{FF2B5EF4-FFF2-40B4-BE49-F238E27FC236}">
-                <a16:creationId xmlns:a16="http://schemas.microsoft.com/office/drawing/2014/main" id="{DC11E6CE-BEEA-4CF1-9D50-E72ECA87590B}"/>
+                <a16:creationId xmlns:a16="http://schemas.microsoft.com/office/drawing/2014/main" id="{228BD5EB-15AE-485E-9CA7-664D6FDD90AC}"/>
               </a:ext>
             </a:extLst>
           </p:cNvPr>
@@ -12701,7 +12901,7 @@
           <p:cNvPr id="20" name="">
             <a:extLst xmlns:a="http://schemas.openxmlformats.org/drawingml/2006/main">
               <a:ext uri="{FF2B5EF4-FFF2-40B4-BE49-F238E27FC236}">
-                <a16:creationId xmlns:a16="http://schemas.microsoft.com/office/drawing/2014/main" id="{23779AF0-97B7-482C-8351-17D4E827DBBB}"/>
+                <a16:creationId xmlns:a16="http://schemas.microsoft.com/office/drawing/2014/main" id="{4E80E741-EED7-43BB-A224-C92898F4D093}"/>
               </a:ext>
             </a:extLst>
           </p:cNvPr>
@@ -12758,7 +12958,7 @@
           <p:cNvPr id="21" name="">
             <a:extLst xmlns:a="http://schemas.openxmlformats.org/drawingml/2006/main">
               <a:ext uri="{FF2B5EF4-FFF2-40B4-BE49-F238E27FC236}">
-                <a16:creationId xmlns:a16="http://schemas.microsoft.com/office/drawing/2014/main" id="{D9A2467F-3418-4022-A75E-DB4FFE21D8BB}"/>
+                <a16:creationId xmlns:a16="http://schemas.microsoft.com/office/drawing/2014/main" id="{88C5389E-3235-47F2-A8DC-495649C79571}"/>
               </a:ext>
             </a:extLst>
           </p:cNvPr>
@@ -12815,7 +13015,7 @@
           <p:cNvPr id="22" name="">
             <a:extLst xmlns:a="http://schemas.openxmlformats.org/drawingml/2006/main">
               <a:ext uri="{FF2B5EF4-FFF2-40B4-BE49-F238E27FC236}">
-                <a16:creationId xmlns:a16="http://schemas.microsoft.com/office/drawing/2014/main" id="{D8BD8007-6935-416A-924D-F126A6201073}"/>
+                <a16:creationId xmlns:a16="http://schemas.microsoft.com/office/drawing/2014/main" id="{CAC07A7C-F58A-4837-BA33-40E7875BC1B6}"/>
               </a:ext>
             </a:extLst>
           </p:cNvPr>
@@ -12870,7 +13070,7 @@
     </p:spTree>
     <p:extLst>
       <p:ext uri="{BB962C8B-B14F-4D97-AF65-F5344CB8AC3E}">
-        <p14:creationId xmlns:p14="http://schemas.microsoft.com/office/powerpoint/2010/main" val="1689596573"/>
+        <p14:creationId xmlns:p14="http://schemas.microsoft.com/office/powerpoint/2010/main" val="273763146"/>
       </p:ext>
     </p:extLst>
   </p:cSld>
@@ -13071,7 +13271,7 @@
           <p:cNvPr id="22" name="">
             <a:extLst xmlns:a="http://schemas.openxmlformats.org/drawingml/2006/main">
               <a:ext uri="{FF2B5EF4-FFF2-40B4-BE49-F238E27FC236}">
-                <a16:creationId xmlns:a16="http://schemas.microsoft.com/office/drawing/2014/main" id="{ACECB394-7A1E-4053-8778-4EFCA0D6411D}"/>
+                <a16:creationId xmlns:a16="http://schemas.microsoft.com/office/drawing/2014/main" id="{D1FFA7F2-C1CC-4B43-8C3F-94607F3EBF69}"/>
               </a:ext>
             </a:extLst>
           </p:cNvPr>
@@ -13103,7 +13303,7 @@
           <p:cNvPr id="2" name="">
             <a:extLst xmlns:a="http://schemas.openxmlformats.org/drawingml/2006/main">
               <a:ext uri="{FF2B5EF4-FFF2-40B4-BE49-F238E27FC236}">
-                <a16:creationId xmlns:a16="http://schemas.microsoft.com/office/drawing/2014/main" id="{92349475-9ABD-4E32-96FF-8D73ACEC6DF9}"/>
+                <a16:creationId xmlns:a16="http://schemas.microsoft.com/office/drawing/2014/main" id="{FD58C33A-B793-4BC0-AC7C-44DE7DE4600A}"/>
               </a:ext>
             </a:extLst>
           </p:cNvPr>
@@ -13160,7 +13360,7 @@
           <p:cNvPr id="3" name="">
             <a:extLst xmlns:a="http://schemas.openxmlformats.org/drawingml/2006/main">
               <a:ext uri="{FF2B5EF4-FFF2-40B4-BE49-F238E27FC236}">
-                <a16:creationId xmlns:a16="http://schemas.microsoft.com/office/drawing/2014/main" id="{2E7E6F58-DF42-4C14-8674-BC6F671DCC8C}"/>
+                <a16:creationId xmlns:a16="http://schemas.microsoft.com/office/drawing/2014/main" id="{D252758D-74CE-4631-AF1E-8ED2ECF77B08}"/>
               </a:ext>
             </a:extLst>
           </p:cNvPr>
@@ -13192,7 +13392,7 @@
           <p:cNvPr id="4" name="">
             <a:extLst xmlns:a="http://schemas.openxmlformats.org/drawingml/2006/main">
               <a:ext uri="{FF2B5EF4-FFF2-40B4-BE49-F238E27FC236}">
-                <a16:creationId xmlns:a16="http://schemas.microsoft.com/office/drawing/2014/main" id="{1D4A50E6-B628-4EAC-9DDE-4A1C17658F76}"/>
+                <a16:creationId xmlns:a16="http://schemas.microsoft.com/office/drawing/2014/main" id="{3BE5EA13-57C6-4A08-92D7-C8D90DA7843D}"/>
               </a:ext>
             </a:extLst>
           </p:cNvPr>
@@ -13249,7 +13449,7 @@
           <p:cNvPr id="5" name="">
             <a:extLst xmlns:a="http://schemas.openxmlformats.org/drawingml/2006/main">
               <a:ext uri="{FF2B5EF4-FFF2-40B4-BE49-F238E27FC236}">
-                <a16:creationId xmlns:a16="http://schemas.microsoft.com/office/drawing/2014/main" id="{52C9E232-53E4-48FA-A641-C982415177A1}"/>
+                <a16:creationId xmlns:a16="http://schemas.microsoft.com/office/drawing/2014/main" id="{911FBBD7-FC3C-48B2-91E3-64D36D11144E}"/>
               </a:ext>
             </a:extLst>
           </p:cNvPr>
@@ -13306,7 +13506,7 @@
           <p:cNvPr id="6" name="">
             <a:extLst xmlns:a="http://schemas.openxmlformats.org/drawingml/2006/main">
               <a:ext uri="{FF2B5EF4-FFF2-40B4-BE49-F238E27FC236}">
-                <a16:creationId xmlns:a16="http://schemas.microsoft.com/office/drawing/2014/main" id="{CE6B5093-95C0-4419-B13D-7D556B1E94F3}"/>
+                <a16:creationId xmlns:a16="http://schemas.microsoft.com/office/drawing/2014/main" id="{AA77F91D-2EC4-4FA5-B9B9-295D6F12B88C}"/>
               </a:ext>
             </a:extLst>
           </p:cNvPr>
@@ -13363,7 +13563,7 @@
           <p:cNvPr id="7" name="">
             <a:extLst xmlns:a="http://schemas.openxmlformats.org/drawingml/2006/main">
               <a:ext uri="{FF2B5EF4-FFF2-40B4-BE49-F238E27FC236}">
-                <a16:creationId xmlns:a16="http://schemas.microsoft.com/office/drawing/2014/main" id="{82B72C40-5449-40EF-88B5-8E08C70AE169}"/>
+                <a16:creationId xmlns:a16="http://schemas.microsoft.com/office/drawing/2014/main" id="{90471970-683D-4955-8A52-8C45A31C5584}"/>
               </a:ext>
             </a:extLst>
           </p:cNvPr>
@@ -13395,7 +13595,7 @@
           <p:cNvPr id="8" name="">
             <a:extLst xmlns:a="http://schemas.openxmlformats.org/drawingml/2006/main">
               <a:ext uri="{FF2B5EF4-FFF2-40B4-BE49-F238E27FC236}">
-                <a16:creationId xmlns:a16="http://schemas.microsoft.com/office/drawing/2014/main" id="{E32EE7F4-6249-44FD-9ADC-2338F6660EBA}"/>
+                <a16:creationId xmlns:a16="http://schemas.microsoft.com/office/drawing/2014/main" id="{A672052F-AF1D-4A15-8619-6494814AC248}"/>
               </a:ext>
             </a:extLst>
           </p:cNvPr>
@@ -13452,7 +13652,7 @@
           <p:cNvPr id="9" name="">
             <a:extLst xmlns:a="http://schemas.openxmlformats.org/drawingml/2006/main">
               <a:ext uri="{FF2B5EF4-FFF2-40B4-BE49-F238E27FC236}">
-                <a16:creationId xmlns:a16="http://schemas.microsoft.com/office/drawing/2014/main" id="{D73CA468-3608-4C70-BCAF-1A511D8E10D0}"/>
+                <a16:creationId xmlns:a16="http://schemas.microsoft.com/office/drawing/2014/main" id="{64E7477E-AFD3-48F1-B869-CE0F7AEF3CD2}"/>
               </a:ext>
             </a:extLst>
           </p:cNvPr>
@@ -13509,7 +13709,7 @@
           <p:cNvPr id="10" name="">
             <a:extLst xmlns:a="http://schemas.openxmlformats.org/drawingml/2006/main">
               <a:ext uri="{FF2B5EF4-FFF2-40B4-BE49-F238E27FC236}">
-                <a16:creationId xmlns:a16="http://schemas.microsoft.com/office/drawing/2014/main" id="{2C1CD8A4-9EE4-4C41-A54E-F414AE84D5B0}"/>
+                <a16:creationId xmlns:a16="http://schemas.microsoft.com/office/drawing/2014/main" id="{DBD4FFCB-A52D-4B7B-AFE9-A53007923C4B}"/>
               </a:ext>
             </a:extLst>
           </p:cNvPr>
@@ -13543,7 +13743,7 @@
           <p:cNvPr id="11" name="">
             <a:extLst xmlns:a="http://schemas.openxmlformats.org/drawingml/2006/main">
               <a:ext uri="{FF2B5EF4-FFF2-40B4-BE49-F238E27FC236}">
-                <a16:creationId xmlns:a16="http://schemas.microsoft.com/office/drawing/2014/main" id="{898A3C58-8707-4BEE-9106-AF16227AA1BA}"/>
+                <a16:creationId xmlns:a16="http://schemas.microsoft.com/office/drawing/2014/main" id="{3134799A-EFAE-4F42-8377-3FFDC6E4F084}"/>
               </a:ext>
             </a:extLst>
           </p:cNvPr>
@@ -13575,7 +13775,7 @@
           <p:cNvPr id="12" name="">
             <a:extLst xmlns:a="http://schemas.openxmlformats.org/drawingml/2006/main">
               <a:ext uri="{FF2B5EF4-FFF2-40B4-BE49-F238E27FC236}">
-                <a16:creationId xmlns:a16="http://schemas.microsoft.com/office/drawing/2014/main" id="{F3EB15A6-1971-4354-BCBA-B0A47E21A7C3}"/>
+                <a16:creationId xmlns:a16="http://schemas.microsoft.com/office/drawing/2014/main" id="{588DD11A-EBA4-46AA-A436-367FCA34BAA9}"/>
               </a:ext>
             </a:extLst>
           </p:cNvPr>
@@ -13632,7 +13832,7 @@
           <p:cNvPr id="13" name="">
             <a:extLst xmlns:a="http://schemas.openxmlformats.org/drawingml/2006/main">
               <a:ext uri="{FF2B5EF4-FFF2-40B4-BE49-F238E27FC236}">
-                <a16:creationId xmlns:a16="http://schemas.microsoft.com/office/drawing/2014/main" id="{2D421AAF-9B61-4F6E-9602-AA8C442DB44A}"/>
+                <a16:creationId xmlns:a16="http://schemas.microsoft.com/office/drawing/2014/main" id="{9A4B9EC2-7C6D-45AD-A3CF-288A672E146C}"/>
               </a:ext>
             </a:extLst>
           </p:cNvPr>
@@ -13689,7 +13889,7 @@
           <p:cNvPr id="14" name="">
             <a:extLst xmlns:a="http://schemas.openxmlformats.org/drawingml/2006/main">
               <a:ext uri="{FF2B5EF4-FFF2-40B4-BE49-F238E27FC236}">
-                <a16:creationId xmlns:a16="http://schemas.microsoft.com/office/drawing/2014/main" id="{B927759D-4A9D-4E2D-8E07-A612F72C2E4A}"/>
+                <a16:creationId xmlns:a16="http://schemas.microsoft.com/office/drawing/2014/main" id="{5B955393-44E8-436A-8008-0A74CD13EE35}"/>
               </a:ext>
             </a:extLst>
           </p:cNvPr>
@@ -13723,7 +13923,7 @@
           <p:cNvPr id="15" name="">
             <a:extLst xmlns:a="http://schemas.openxmlformats.org/drawingml/2006/main">
               <a:ext uri="{FF2B5EF4-FFF2-40B4-BE49-F238E27FC236}">
-                <a16:creationId xmlns:a16="http://schemas.microsoft.com/office/drawing/2014/main" id="{2B635136-749F-43CB-B9E0-0349F66B51A1}"/>
+                <a16:creationId xmlns:a16="http://schemas.microsoft.com/office/drawing/2014/main" id="{5EB05DA5-9B35-411C-AF1A-9A4F93102350}"/>
               </a:ext>
             </a:extLst>
           </p:cNvPr>
@@ -13755,7 +13955,7 @@
           <p:cNvPr id="16" name="">
             <a:extLst xmlns:a="http://schemas.openxmlformats.org/drawingml/2006/main">
               <a:ext uri="{FF2B5EF4-FFF2-40B4-BE49-F238E27FC236}">
-                <a16:creationId xmlns:a16="http://schemas.microsoft.com/office/drawing/2014/main" id="{04C6977B-59A1-48AF-9475-F1F0BA8C323B}"/>
+                <a16:creationId xmlns:a16="http://schemas.microsoft.com/office/drawing/2014/main" id="{DD67BB66-C85D-4FB7-94AE-A8B7A3C685AA}"/>
               </a:ext>
             </a:extLst>
           </p:cNvPr>
@@ -13812,7 +14012,7 @@
           <p:cNvPr id="17" name="">
             <a:extLst xmlns:a="http://schemas.openxmlformats.org/drawingml/2006/main">
               <a:ext uri="{FF2B5EF4-FFF2-40B4-BE49-F238E27FC236}">
-                <a16:creationId xmlns:a16="http://schemas.microsoft.com/office/drawing/2014/main" id="{6786F068-001D-4BA4-87FE-47BF6BBA3352}"/>
+                <a16:creationId xmlns:a16="http://schemas.microsoft.com/office/drawing/2014/main" id="{027620BE-7126-4A44-879F-454D4EA18129}"/>
               </a:ext>
             </a:extLst>
           </p:cNvPr>
@@ -13869,7 +14069,7 @@
           <p:cNvPr id="18" name="">
             <a:extLst xmlns:a="http://schemas.openxmlformats.org/drawingml/2006/main">
               <a:ext uri="{FF2B5EF4-FFF2-40B4-BE49-F238E27FC236}">
-                <a16:creationId xmlns:a16="http://schemas.microsoft.com/office/drawing/2014/main" id="{8F67B61E-0BA5-46EF-AD69-7F39AE02170D}"/>
+                <a16:creationId xmlns:a16="http://schemas.microsoft.com/office/drawing/2014/main" id="{4D25CAE1-D0CC-4DBA-A652-F433989ABA64}"/>
               </a:ext>
             </a:extLst>
           </p:cNvPr>
@@ -13903,7 +14103,7 @@
           <p:cNvPr id="19" name="">
             <a:extLst xmlns:a="http://schemas.openxmlformats.org/drawingml/2006/main">
               <a:ext uri="{FF2B5EF4-FFF2-40B4-BE49-F238E27FC236}">
-                <a16:creationId xmlns:a16="http://schemas.microsoft.com/office/drawing/2014/main" id="{00BCB1D5-CBBF-4C9E-BE76-C0DB92B86C98}"/>
+                <a16:creationId xmlns:a16="http://schemas.microsoft.com/office/drawing/2014/main" id="{DB5AE244-EC23-4CE6-A896-42B9A1959427}"/>
               </a:ext>
             </a:extLst>
           </p:cNvPr>
@@ -13935,7 +14135,7 @@
           <p:cNvPr id="20" name="">
             <a:extLst xmlns:a="http://schemas.openxmlformats.org/drawingml/2006/main">
               <a:ext uri="{FF2B5EF4-FFF2-40B4-BE49-F238E27FC236}">
-                <a16:creationId xmlns:a16="http://schemas.microsoft.com/office/drawing/2014/main" id="{2BE7ABCB-50CF-4205-9D40-17F3112DD6B0}"/>
+                <a16:creationId xmlns:a16="http://schemas.microsoft.com/office/drawing/2014/main" id="{33B36534-52A2-42C9-A587-449D1FDD0377}"/>
               </a:ext>
             </a:extLst>
           </p:cNvPr>
@@ -13992,7 +14192,7 @@
           <p:cNvPr id="21" name="">
             <a:extLst xmlns:a="http://schemas.openxmlformats.org/drawingml/2006/main">
               <a:ext uri="{FF2B5EF4-FFF2-40B4-BE49-F238E27FC236}">
-                <a16:creationId xmlns:a16="http://schemas.microsoft.com/office/drawing/2014/main" id="{52F5EE7D-31F8-4666-920D-F8F70491D197}"/>
+                <a16:creationId xmlns:a16="http://schemas.microsoft.com/office/drawing/2014/main" id="{EBADA6D2-0DA0-43DD-B65B-4B4D3A7045F9}"/>
               </a:ext>
             </a:extLst>
           </p:cNvPr>
@@ -14047,7 +14247,7 @@
     </p:spTree>
     <p:extLst>
       <p:ext uri="{BB962C8B-B14F-4D97-AF65-F5344CB8AC3E}">
-        <p14:creationId xmlns:p14="http://schemas.microsoft.com/office/powerpoint/2010/main" val="1771041431"/>
+        <p14:creationId xmlns:p14="http://schemas.microsoft.com/office/powerpoint/2010/main" val="60420442"/>
       </p:ext>
     </p:extLst>
   </p:cSld>
